--- a/final_demo_pitch/ppt_assets/COAST_SIH2026_IDEA.pptx
+++ b/final_demo_pitch/ppt_assets/COAST_SIH2026_IDEA.pptx
@@ -1342,184 +1342,6 @@
     <p:extLst>
       <p:ext uri="{BB962C8B-B14F-4D97-AF65-F5344CB8AC3E}">
         <p14:creationId xmlns:p14="http://schemas.microsoft.com/office/powerpoint/2010/main" val="1908672725"/>
-      </p:ext>
-    </p:extLst>
-  </p:cSld>
-  <p:clrMapOvr>
-    <a:masterClrMapping/>
-  </p:clrMapOvr>
-</p:notes>
-</file>
-
-<file path=ppt/notesSlides/notesSlide6.xml><?xml version="1.0" encoding="utf-8"?>
-<p:notes xmlns:a="http://schemas.openxmlformats.org/drawingml/2006/main" xmlns:r="http://schemas.openxmlformats.org/officeDocument/2006/relationships" xmlns:p="http://schemas.openxmlformats.org/presentationml/2006/main">
-  <p:cSld>
-    <p:spTree>
-      <p:nvGrpSpPr>
-        <p:cNvPr id="1" name=""/>
-        <p:cNvGrpSpPr/>
-        <p:nvPr/>
-      </p:nvGrpSpPr>
-      <p:grpSpPr>
-        <a:xfrm>
-          <a:off x="0" y="0"/>
-          <a:ext cx="0" cy="0"/>
-          <a:chOff x="0" y="0"/>
-          <a:chExt cx="0" cy="0"/>
-        </a:xfrm>
-      </p:grpSpPr>
-      <p:sp>
-        <p:nvSpPr>
-          <p:cNvPr id="18433" name="Slide Image Placeholder 1"/>
-          <p:cNvSpPr>
-            <a:spLocks noGrp="1" noRot="1" noChangeAspect="1"/>
-          </p:cNvSpPr>
-          <p:nvPr>
-            <p:ph type="sldImg"/>
-          </p:nvPr>
-        </p:nvSpPr>
-        <p:spPr bwMode="auto">
-          <a:xfrm>
-            <a:off x="381000" y="685800"/>
-            <a:ext cx="6096000" cy="3429000"/>
-          </a:xfrm>
-          <a:noFill/>
-          <a:ln>
-            <a:solidFill>
-              <a:srgbClr val="000000"/>
-            </a:solidFill>
-            <a:miter lim="800000"/>
-            <a:headEnd/>
-            <a:tailEnd/>
-          </a:ln>
-        </p:spPr>
-      </p:sp>
-      <p:sp>
-        <p:nvSpPr>
-          <p:cNvPr id="18434" name="Notes Placeholder 2"/>
-          <p:cNvSpPr>
-            <a:spLocks noGrp="1"/>
-          </p:cNvSpPr>
-          <p:nvPr>
-            <p:ph type="body" idx="1"/>
-          </p:nvPr>
-        </p:nvSpPr>
-        <p:spPr bwMode="auto">
-          <a:noFill/>
-        </p:spPr>
-        <p:txBody>
-          <a:bodyPr wrap="square" numCol="1" anchor="t" anchorCtr="0" compatLnSpc="1">
-            <a:prstTxWarp prst="textNoShape">
-              <a:avLst/>
-            </a:prstTxWarp>
-          </a:bodyPr>
-          <a:lstStyle/>
-          <a:p>
-            <a:pPr eaLnBrk="1" hangingPunct="1">
-              <a:spcBef>
-                <a:spcPct val="0"/>
-              </a:spcBef>
-            </a:pPr>
-            <a:endParaRPr lang="en-US">
-              <a:ea typeface="ＭＳ Ｐゴシック" pitchFamily="1" charset="-128"/>
-            </a:endParaRPr>
-          </a:p>
-        </p:txBody>
-      </p:sp>
-      <p:sp>
-        <p:nvSpPr>
-          <p:cNvPr id="18435" name="Slide Number Placeholder 3"/>
-          <p:cNvSpPr>
-            <a:spLocks noGrp="1"/>
-          </p:cNvSpPr>
-          <p:nvPr>
-            <p:ph type="sldNum" sz="quarter" idx="5"/>
-          </p:nvPr>
-        </p:nvSpPr>
-        <p:spPr bwMode="auto">
-          <a:noFill/>
-          <a:ln>
-            <a:miter lim="800000"/>
-            <a:headEnd/>
-            <a:tailEnd/>
-          </a:ln>
-        </p:spPr>
-        <p:txBody>
-          <a:bodyPr/>
-          <a:lstStyle/>
-          <a:p>
-            <a:pPr marL="0" marR="0" lvl="0" indent="0" algn="r" defTabSz="457200" rtl="0" eaLnBrk="1" fontAlgn="base" latinLnBrk="0" hangingPunct="1">
-              <a:lnSpc>
-                <a:spcPct val="100000"/>
-              </a:lnSpc>
-              <a:spcBef>
-                <a:spcPct val="0"/>
-              </a:spcBef>
-              <a:spcAft>
-                <a:spcPct val="0"/>
-              </a:spcAft>
-              <a:buClrTx/>
-              <a:buSzTx/>
-              <a:buFontTx/>
-              <a:buNone/>
-              <a:tabLst/>
-              <a:defRPr/>
-            </a:pPr>
-            <a:fld id="{0CA7B74D-3791-4AC6-8451-F10DBCCCDD9A}" type="slidenum">
-              <a:rPr kumimoji="0" lang="en-US" sz="1200" b="0" i="0" u="none" strike="noStrike" kern="1200" cap="none" spc="0" normalizeH="0" baseline="0" noProof="0">
-                <a:ln>
-                  <a:noFill/>
-                </a:ln>
-                <a:solidFill>
-                  <a:prstClr val="black"/>
-                </a:solidFill>
-                <a:effectLst/>
-                <a:uLnTx/>
-                <a:uFillTx/>
-                <a:latin typeface="Calibri" pitchFamily="34" charset="0"/>
-                <a:ea typeface="ＭＳ Ｐゴシック" pitchFamily="1" charset="-128"/>
-                <a:cs typeface="+mn-cs"/>
-              </a:rPr>
-              <a:pPr marL="0" marR="0" lvl="0" indent="0" algn="r" defTabSz="457200" rtl="0" eaLnBrk="1" fontAlgn="base" latinLnBrk="0" hangingPunct="1">
-                <a:lnSpc>
-                  <a:spcPct val="100000"/>
-                </a:lnSpc>
-                <a:spcBef>
-                  <a:spcPct val="0"/>
-                </a:spcBef>
-                <a:spcAft>
-                  <a:spcPct val="0"/>
-                </a:spcAft>
-                <a:buClrTx/>
-                <a:buSzTx/>
-                <a:buFontTx/>
-                <a:buNone/>
-                <a:tabLst/>
-                <a:defRPr/>
-              </a:pPr>
-              <a:t>7</a:t>
-            </a:fld>
-            <a:endParaRPr kumimoji="0" lang="en-US" sz="1200" b="0" i="0" u="none" strike="noStrike" kern="1200" cap="none" spc="0" normalizeH="0" baseline="0" noProof="0">
-              <a:ln>
-                <a:noFill/>
-              </a:ln>
-              <a:solidFill>
-                <a:prstClr val="black"/>
-              </a:solidFill>
-              <a:effectLst/>
-              <a:uLnTx/>
-              <a:uFillTx/>
-              <a:latin typeface="Calibri" pitchFamily="34" charset="0"/>
-              <a:ea typeface="ＭＳ Ｐゴシック" pitchFamily="1" charset="-128"/>
-              <a:cs typeface="+mn-cs"/>
-            </a:endParaRPr>
-          </a:p>
-        </p:txBody>
-      </p:sp>
-    </p:spTree>
-    <p:extLst>
-      <p:ext uri="{BB962C8B-B14F-4D97-AF65-F5344CB8AC3E}">
-        <p14:creationId xmlns:p14="http://schemas.microsoft.com/office/powerpoint/2010/main" val="3783576877"/>
       </p:ext>
     </p:extLst>
   </p:cSld>
@@ -5727,12 +5549,29 @@
           <a:lstStyle/>
           <a:p>
             <a:r>
-              <a:rPr sz="2000" b="1">
-                <a:solidFill>
-                  <a:srgbClr val="008A66"/>
-                </a:solidFill>
-              </a:rPr>
-              <a:t>COAST — when GPS dies, you coast on sensors</a:t>
+              <a:rPr sz="3000" b="1">
+                <a:solidFill>
+                  <a:srgbClr val="0070C0"/>
+                </a:solidFill>
+              </a:rPr>
+              <a:t>COAST</a:t>
+            </a:r>
+            <a:endParaRPr lang="en-US" b="1" dirty="0">
+              <a:solidFill>
+                <a:schemeClr val="tx1"/>
+              </a:solidFill>
+              <a:latin typeface="Times New Roman" panose="02020603050405020304" pitchFamily="18" charset="0"/>
+              <a:cs typeface="Times New Roman" panose="02020603050405020304" pitchFamily="18" charset="0"/>
+            </a:endParaRPr>
+          </a:p>
+          <a:p>
+            <a:r>
+              <a:rPr sz="1500" i="1">
+                <a:solidFill>
+                  <a:srgbClr val="6B7A8C"/>
+                </a:solidFill>
+              </a:rPr>
+              <a:t>When GPS dies, you coast on sensors.</a:t>
             </a:r>
           </a:p>
         </p:txBody>
@@ -5808,92 +5647,140 @@
           <a:p>
             <a:pPr>
               <a:spcAft>
-                <a:spcPts val="600"/>
+                <a:spcPts val="700"/>
               </a:spcAft>
             </a:pPr>
             <a:r>
+              <a:rPr sz="1500">
+                <a:solidFill>
+                  <a:srgbClr val="6B7A8C"/>
+                </a:solidFill>
+              </a:rPr>
+              <a:t>Problem Statement ID – </a:t>
+            </a:r>
+            <a:r>
               <a:rPr sz="1500" b="1">
                 <a:solidFill>
-                  <a:srgbClr val="0B1F2A"/>
-                </a:solidFill>
-              </a:rPr>
-              <a:t>Problem Statement ID – 26168</a:t>
+                  <a:srgbClr val="0B1220"/>
+                </a:solidFill>
+              </a:rPr>
+              <a:t>26168</a:t>
             </a:r>
             <a:endParaRPr lang="en-US" dirty="0"/>
           </a:p>
           <a:p>
             <a:pPr>
               <a:spcAft>
-                <a:spcPts val="600"/>
+                <a:spcPts val="700"/>
               </a:spcAft>
             </a:pPr>
             <a:r>
-              <a:rPr sz="1250" b="0">
-                <a:solidFill>
-                  <a:srgbClr val="0B1F2A"/>
-                </a:solidFill>
-              </a:rPr>
-              <a:t>Title – AI-ML based Intelligent Dead Reckoning system for seamless navigation</a:t>
+              <a:rPr sz="1500">
+                <a:solidFill>
+                  <a:srgbClr val="6B7A8C"/>
+                </a:solidFill>
+              </a:rPr>
+              <a:t>Problem Statement Title – </a:t>
+            </a:r>
+            <a:r>
+              <a:rPr sz="1500" b="1">
+                <a:solidFill>
+                  <a:srgbClr val="0B1220"/>
+                </a:solidFill>
+              </a:rPr>
+              <a:t>AI-ML based Intelligent Dead Reckoning system for seamless navigation</a:t>
             </a:r>
           </a:p>
           <a:p>
             <a:pPr>
               <a:spcAft>
-                <a:spcPts val="600"/>
+                <a:spcPts val="700"/>
               </a:spcAft>
             </a:pPr>
             <a:r>
-              <a:rPr sz="1250" b="0">
-                <a:solidFill>
-                  <a:srgbClr val="0B1F2A"/>
-                </a:solidFill>
-              </a:rPr>
-              <a:t>Organisation – ISRO (Department of Space)</a:t>
+              <a:rPr sz="1500">
+                <a:solidFill>
+                  <a:srgbClr val="6B7A8C"/>
+                </a:solidFill>
+              </a:rPr>
+              <a:t>Theme – </a:t>
+            </a:r>
+            <a:r>
+              <a:rPr sz="1500" b="1">
+                <a:solidFill>
+                  <a:srgbClr val="0B1220"/>
+                </a:solidFill>
+              </a:rPr>
+              <a:t>Space Technology</a:t>
             </a:r>
           </a:p>
           <a:p>
             <a:pPr>
               <a:spcAft>
-                <a:spcPts val="600"/>
+                <a:spcPts val="700"/>
               </a:spcAft>
             </a:pPr>
             <a:r>
-              <a:rPr sz="1250" b="0">
-                <a:solidFill>
-                  <a:srgbClr val="0B1F2A"/>
-                </a:solidFill>
-              </a:rPr>
-              <a:t>Theme – Space Technology    |    PS Category – Software</a:t>
+              <a:rPr sz="1500">
+                <a:solidFill>
+                  <a:srgbClr val="6B7A8C"/>
+                </a:solidFill>
+              </a:rPr>
+              <a:t>PS Category – </a:t>
+            </a:r>
+            <a:r>
+              <a:rPr sz="1500" b="1">
+                <a:solidFill>
+                  <a:srgbClr val="0B1220"/>
+                </a:solidFill>
+              </a:rPr>
+              <a:t>Software</a:t>
             </a:r>
           </a:p>
           <a:p>
             <a:pPr>
               <a:spcAft>
-                <a:spcPts val="600"/>
+                <a:spcPts val="700"/>
               </a:spcAft>
             </a:pPr>
             <a:r>
-              <a:rPr sz="1250" b="0">
-                <a:solidFill>
-                  <a:srgbClr val="0B1F2A"/>
-                </a:solidFill>
-              </a:rPr>
-              <a:t>Team ID – [Team ID]</a:t>
+              <a:rPr sz="1500">
+                <a:solidFill>
+                  <a:srgbClr val="6B7A8C"/>
+                </a:solidFill>
+              </a:rPr>
+              <a:t>Team ID – </a:t>
+            </a:r>
+            <a:r>
+              <a:rPr sz="1500" b="1">
+                <a:solidFill>
+                  <a:srgbClr val="0B1220"/>
+                </a:solidFill>
+              </a:rPr>
+              <a:t>TEAM ID</a:t>
             </a:r>
           </a:p>
           <a:p>
             <a:pPr>
               <a:spcAft>
-                <a:spcPts val="600"/>
+                <a:spcPts val="700"/>
               </a:spcAft>
             </a:pPr>
             <a:r>
-              <a:rPr sz="1250" b="0">
-                <a:solidFill>
-                  <a:srgbClr val="0B1F2A"/>
-                </a:solidFill>
-              </a:rPr>
-              <a:t>Team Name – [Team Name]</a:t>
+              <a:rPr sz="1500">
+                <a:solidFill>
+                  <a:srgbClr val="6B7A8C"/>
+                </a:solidFill>
+              </a:rPr>
+              <a:t>Team Name – </a:t>
+            </a:r>
+            <a:r>
+              <a:rPr sz="1500" b="1">
+                <a:solidFill>
+                  <a:srgbClr val="0B1220"/>
+                </a:solidFill>
+              </a:rPr>
+              <a:t>TEAM NAME</a:t>
             </a:r>
           </a:p>
         </p:txBody>
@@ -6031,109 +5918,14 @@
           <a:bodyPr/>
           <a:lstStyle/>
           <a:p>
-            <a:r>
-              <a:rPr sz="2500" b="1"/>
-              <a:t>THE IDEA — COAST keeps you on the map when GPS dies</a:t>
-            </a:r>
-          </a:p>
-        </p:txBody>
-      </p:sp>
-      <p:sp>
-        <p:nvSpPr>
-          <p:cNvPr id="15362" name="TextBox 8"/>
-          <p:cNvSpPr txBox="1">
-            <a:spLocks noChangeArrowheads="1"/>
-          </p:cNvSpPr>
-          <p:nvPr/>
-        </p:nvSpPr>
-        <p:spPr bwMode="auto">
-          <a:xfrm>
-            <a:off x="457200" y="1188720"/>
-            <a:ext cx="11247120" cy="1874519"/>
-          </a:xfrm>
-          <a:prstGeom prst="rect">
-            <a:avLst/>
-          </a:prstGeom>
-          <a:noFill/>
-          <a:ln w="9525">
-            <a:noFill/>
-            <a:miter lim="800000"/>
-            <a:headEnd/>
-            <a:tailEnd/>
-          </a:ln>
-        </p:spPr>
-        <p:txBody>
-          <a:bodyPr wrap="square">
-            <a:spAutoFit/>
-          </a:bodyPr>
-          <a:lstStyle/>
-          <a:p>
-            <a:pPr marL="342900" indent="-342900">
-              <a:spcAft>
-                <a:spcPts val="400"/>
-              </a:spcAft>
-              <a:buFont typeface="Wingdings" panose="05000000000000000000" pitchFamily="2" charset="2"/>
-              <a:buChar char="v"/>
-            </a:pPr>
-            <a:r>
-              <a:rPr sz="1300" b="1">
-                <a:solidFill>
-                  <a:srgbClr val="0B1F2A"/>
-                </a:solidFill>
-              </a:rPr>
-              <a:t>• Problem: in tunnels, underpasses, metros &amp; under jamming, consumer GPS dies and the phone's map freezes.</a:t>
-            </a:r>
-            <a:endParaRPr lang="en-US" sz="3200" u="sng" dirty="0">
-              <a:solidFill>
-                <a:schemeClr val="tx2"/>
-              </a:solidFill>
-              <a:latin typeface="Arial" pitchFamily="34" charset="0"/>
-              <a:cs typeface="Arial" pitchFamily="34" charset="0"/>
-            </a:endParaRPr>
-          </a:p>
-          <a:p>
-            <a:pPr>
-              <a:spcAft>
-                <a:spcPts val="400"/>
-              </a:spcAft>
-            </a:pPr>
-            <a:r>
-              <a:rPr sz="1300" b="1">
-                <a:solidFill>
-                  <a:srgbClr val="0B1F2A"/>
-                </a:solidFill>
-              </a:rPr>
-              <a:t>• Idea: COAST keeps position moving from the phone's OWN accelerometer + gyroscope — no internet, no extra hardware.</a:t>
-            </a:r>
-          </a:p>
-          <a:p>
-            <a:pPr>
-              <a:spcAft>
-                <a:spcPts val="400"/>
-              </a:spcAft>
-            </a:pPr>
-            <a:r>
-              <a:rPr sz="1300" b="1">
-                <a:solidFill>
-                  <a:srgbClr val="0B1F2A"/>
-                </a:solidFill>
-              </a:rPr>
-              <a:t>• Innovation: the OpenStreetMap road graph sits INSIDE the estimator loop, so the state lives on the road → error cannot run away (not a post-hoc cleanup).</a:t>
-            </a:r>
-          </a:p>
-          <a:p>
-            <a:pPr>
-              <a:spcAft>
-                <a:spcPts val="400"/>
-              </a:spcAft>
-            </a:pPr>
-            <a:r>
-              <a:rPr sz="1300" b="1">
-                <a:solidFill>
-                  <a:srgbClr val="0B1F2A"/>
-                </a:solidFill>
-              </a:rPr>
-              <a:t>• Proof we understand it: even a PERFECT gyro fails 55% of 60-s segments — a better sensor is NOT the fix; the map-in-loop is.</a:t>
+            <a:pPr eaLnBrk="1" hangingPunct="1"/>
+            <a:r>
+              <a:rPr lang="en-US" sz="3600" b="1" dirty="0">
+                <a:latin typeface="Times New Roman" panose="02020603050405020304" pitchFamily="18" charset="0"/>
+                <a:ea typeface="ＭＳ Ｐゴシック" pitchFamily="1" charset="-128"/>
+                <a:cs typeface="Times New Roman" panose="02020603050405020304" pitchFamily="18" charset="0"/>
+              </a:rPr>
+              <a:t>COAST — NAVIGATION THAT SURVIVES THE TUNNEL</a:t>
             </a:r>
           </a:p>
         </p:txBody>
@@ -6248,13 +6040,19 @@
           </a:fontRef>
         </p:style>
         <p:txBody>
-          <a:bodyPr rtlCol="0" anchor="ctr"/>
+          <a:bodyPr rtlCol="0" anchor="ctr" wrap="square"/>
           <a:lstStyle/>
           <a:p>
-            <a:r>
-              <a:rPr sz="900"/>
-              <a:t>[Team Name]</a:t>
-            </a:r>
+            <a:pPr algn="ctr"/>
+            <a:r>
+              <a:rPr sz="1050" b="1">
+                <a:solidFill>
+                  <a:srgbClr val="FFFFFF"/>
+                </a:solidFill>
+              </a:rPr>
+              <a:t>TEAM NAME</a:t>
+            </a:r>
+            <a:endParaRPr lang="en-IN" dirty="0"/>
           </a:p>
         </p:txBody>
       </p:sp>
@@ -6288,9 +6086,177 @@
           </a:prstGeom>
         </p:spPr>
       </p:pic>
+      <p:sp>
+        <p:nvSpPr>
+          <p:cNvPr id="15362" name="TextBox 15361"/>
+          <p:cNvSpPr txBox="1"/>
+          <p:nvPr/>
+        </p:nvSpPr>
+        <p:spPr>
+          <a:xfrm>
+            <a:off x="566928" y="1170432"/>
+            <a:ext cx="5943600" cy="566928"/>
+          </a:xfrm>
+          <a:prstGeom prst="rect">
+            <a:avLst/>
+          </a:prstGeom>
+          <a:noFill/>
+        </p:spPr>
+        <p:txBody>
+          <a:bodyPr wrap="square">
+            <a:spAutoFit/>
+          </a:bodyPr>
+          <a:lstStyle/>
+          <a:p>
+            <a:pPr>
+              <a:spcBef>
+                <a:spcPts val="0"/>
+              </a:spcBef>
+              <a:spcAft>
+                <a:spcPts val="400"/>
+              </a:spcAft>
+            </a:pPr>
+            <a:r>
+              <a:rPr sz="1450" b="1" i="0">
+                <a:solidFill>
+                  <a:srgbClr val="0B1220"/>
+                </a:solidFill>
+              </a:rPr>
+              <a:t>Everyone tries to fix this with a better sensor. We measured that instinct — and it is wrong.</a:t>
+            </a:r>
+          </a:p>
+        </p:txBody>
+      </p:sp>
+      <p:sp>
+        <p:nvSpPr>
+          <p:cNvPr id="15363" name="TextBox 15362"/>
+          <p:cNvSpPr txBox="1"/>
+          <p:nvPr/>
+        </p:nvSpPr>
+        <p:spPr>
+          <a:xfrm>
+            <a:off x="566928" y="1810512"/>
+            <a:ext cx="5943600" cy="2834640"/>
+          </a:xfrm>
+          <a:prstGeom prst="rect">
+            <a:avLst/>
+          </a:prstGeom>
+          <a:noFill/>
+        </p:spPr>
+        <p:txBody>
+          <a:bodyPr wrap="square">
+            <a:spAutoFit/>
+          </a:bodyPr>
+          <a:lstStyle/>
+          <a:p>
+            <a:pPr>
+              <a:spcBef>
+                <a:spcPts val="0"/>
+              </a:spcBef>
+              <a:spcAft>
+                <a:spcPts val="400"/>
+              </a:spcAft>
+            </a:pPr>
+            <a:r>
+              <a:rPr sz="1250" b="1">
+                <a:solidFill>
+                  <a:srgbClr val="008A72"/>
+                </a:solidFill>
+              </a:rPr>
+              <a:t>01  </a:t>
+            </a:r>
+            <a:r>
+              <a:rPr sz="1250" b="0" i="0">
+                <a:solidFill>
+                  <a:srgbClr val="2B3645"/>
+                </a:solidFill>
+              </a:rPr>
+              <a:t>Given a perfect, zero-error gyroscope, dead reckoning still fails 55% of 60-second segments. The bottleneck was never sensor quality — it is that nothing stops the estimate leaving the road.</a:t>
+            </a:r>
+          </a:p>
+          <a:p>
+            <a:pPr>
+              <a:spcBef>
+                <a:spcPts val="800"/>
+              </a:spcBef>
+              <a:spcAft>
+                <a:spcPts val="400"/>
+              </a:spcAft>
+            </a:pPr>
+            <a:r>
+              <a:rPr sz="1250" b="1">
+                <a:solidFill>
+                  <a:srgbClr val="008A72"/>
+                </a:solidFill>
+              </a:rPr>
+              <a:t>02  </a:t>
+            </a:r>
+            <a:r>
+              <a:rPr sz="1250" b="0" i="0">
+                <a:solidFill>
+                  <a:srgbClr val="2B3645"/>
+                </a:solidFill>
+              </a:rPr>
+              <a:t>So we changed what the filter is allowed to believe. Its state is not a free position (x, y); it is (which road edge, how far along it). Off-road is not representable, so lateral error cannot accumulate.</a:t>
+            </a:r>
+          </a:p>
+          <a:p>
+            <a:pPr>
+              <a:spcBef>
+                <a:spcPts val="800"/>
+              </a:spcBef>
+              <a:spcAft>
+                <a:spcPts val="400"/>
+              </a:spcAft>
+            </a:pPr>
+            <a:r>
+              <a:rPr sz="1250" b="1">
+                <a:solidFill>
+                  <a:srgbClr val="008A72"/>
+                </a:solidFill>
+              </a:rPr>
+              <a:t>03  </a:t>
+            </a:r>
+            <a:r>
+              <a:rPr sz="1250" b="0" i="0">
+                <a:solidFill>
+                  <a:srgbClr val="2B3645"/>
+                </a:solidFill>
+              </a:rPr>
+              <a:t>This only works in the loop. Snapping a finished track to the nearest road scores 0.98× — worse than doing nothing. Same map, opposite architecture.</a:t>
+            </a:r>
+          </a:p>
+          <a:p>
+            <a:pPr>
+              <a:spcBef>
+                <a:spcPts val="800"/>
+              </a:spcBef>
+              <a:spcAft>
+                <a:spcPts val="400"/>
+              </a:spcAft>
+            </a:pPr>
+            <a:r>
+              <a:rPr sz="1250" b="1">
+                <a:solidFill>
+                  <a:srgbClr val="008A72"/>
+                </a:solidFill>
+              </a:rPr>
+              <a:t>04  </a:t>
+            </a:r>
+            <a:r>
+              <a:rPr sz="1250" b="0" i="0">
+                <a:solidFill>
+                  <a:srgbClr val="2B3645"/>
+                </a:solidFill>
+              </a:rPr>
+              <a:t>Runs on the phone already in the vehicle. No OBD-II, no dongle, no network — the map database is offline OpenStreetMap, as the problem statement specifies.</a:t>
+            </a:r>
+          </a:p>
+        </p:txBody>
+      </p:sp>
       <p:pic>
         <p:nvPicPr>
-          <p:cNvPr id="15363" name="Picture 15362" descr="concept.png"/>
+          <p:cNvPr id="15364" name="Picture 15363" descr="inversion.png"/>
           <p:cNvPicPr>
             <a:picLocks noChangeAspect="1"/>
           </p:cNvPicPr>
@@ -6304,14 +6270,214 @@
         </p:blipFill>
         <p:spPr>
           <a:xfrm>
-            <a:off x="2145930" y="3154680"/>
-            <a:ext cx="7897090" cy="3108960"/>
+            <a:off x="6675120" y="1325880"/>
+            <a:ext cx="5120640" cy="3151400"/>
           </a:xfrm>
           <a:prstGeom prst="rect">
             <a:avLst/>
           </a:prstGeom>
         </p:spPr>
       </p:pic>
+      <p:sp>
+        <p:nvSpPr>
+          <p:cNvPr id="15365" name="TextBox 15364"/>
+          <p:cNvSpPr txBox="1"/>
+          <p:nvPr/>
+        </p:nvSpPr>
+        <p:spPr>
+          <a:xfrm>
+            <a:off x="6675120" y="4709160"/>
+            <a:ext cx="5120640" cy="457200"/>
+          </a:xfrm>
+          <a:prstGeom prst="rect">
+            <a:avLst/>
+          </a:prstGeom>
+          <a:noFill/>
+        </p:spPr>
+        <p:txBody>
+          <a:bodyPr wrap="square">
+            <a:spAutoFit/>
+          </a:bodyPr>
+          <a:lstStyle/>
+          <a:p>
+            <a:pPr>
+              <a:spcBef>
+                <a:spcPts val="0"/>
+              </a:spcBef>
+              <a:spcAft>
+                <a:spcPts val="400"/>
+              </a:spcAft>
+            </a:pPr>
+            <a:r>
+              <a:rPr sz="1000" b="0" i="1">
+                <a:solidFill>
+                  <a:srgbClr val="6B7A8C"/>
+                </a:solidFill>
+              </a:rPr>
+              <a:t>Measured on 43 real GNSS outages from IO-VNBD, scored against vehicle CAN-bus ground truth.</a:t>
+            </a:r>
+          </a:p>
+        </p:txBody>
+      </p:sp>
+      <p:sp>
+        <p:nvSpPr>
+          <p:cNvPr id="15366" name="TextBox 15365"/>
+          <p:cNvSpPr txBox="1"/>
+          <p:nvPr/>
+        </p:nvSpPr>
+        <p:spPr>
+          <a:xfrm>
+            <a:off x="566928" y="4846320"/>
+            <a:ext cx="1920240" cy="960120"/>
+          </a:xfrm>
+          <a:prstGeom prst="rect">
+            <a:avLst/>
+          </a:prstGeom>
+          <a:noFill/>
+        </p:spPr>
+        <p:txBody>
+          <a:bodyPr wrap="square">
+            <a:spAutoFit/>
+          </a:bodyPr>
+          <a:lstStyle/>
+          <a:p>
+            <a:pPr>
+              <a:spcAft>
+                <a:spcPts val="100"/>
+              </a:spcAft>
+            </a:pPr>
+            <a:r>
+              <a:rPr sz="3000" b="1">
+                <a:solidFill>
+                  <a:srgbClr val="008A72"/>
+                </a:solidFill>
+              </a:rPr>
+              <a:t>2.02×</a:t>
+            </a:r>
+          </a:p>
+          <a:p>
+            <a:pPr>
+              <a:spcBef>
+                <a:spcPts val="0"/>
+              </a:spcBef>
+            </a:pPr>
+            <a:r>
+              <a:rPr sz="1050">
+                <a:solidFill>
+                  <a:srgbClr val="6B7A8C"/>
+                </a:solidFill>
+              </a:rPr>
+              <a:t>lower median position error</a:t>
+            </a:r>
+          </a:p>
+        </p:txBody>
+      </p:sp>
+      <p:sp>
+        <p:nvSpPr>
+          <p:cNvPr id="15367" name="TextBox 15366"/>
+          <p:cNvSpPr txBox="1"/>
+          <p:nvPr/>
+        </p:nvSpPr>
+        <p:spPr>
+          <a:xfrm>
+            <a:off x="2578608" y="4846320"/>
+            <a:ext cx="1920240" cy="960120"/>
+          </a:xfrm>
+          <a:prstGeom prst="rect">
+            <a:avLst/>
+          </a:prstGeom>
+          <a:noFill/>
+        </p:spPr>
+        <p:txBody>
+          <a:bodyPr wrap="square">
+            <a:spAutoFit/>
+          </a:bodyPr>
+          <a:lstStyle/>
+          <a:p>
+            <a:pPr>
+              <a:spcAft>
+                <a:spcPts val="100"/>
+              </a:spcAft>
+            </a:pPr>
+            <a:r>
+              <a:rPr sz="3000" b="1">
+                <a:solidFill>
+                  <a:srgbClr val="008A72"/>
+                </a:solidFill>
+              </a:rPr>
+              <a:t>55%</a:t>
+            </a:r>
+          </a:p>
+          <a:p>
+            <a:pPr>
+              <a:spcBef>
+                <a:spcPts val="0"/>
+              </a:spcBef>
+            </a:pPr>
+            <a:r>
+              <a:rPr sz="1050">
+                <a:solidFill>
+                  <a:srgbClr val="6B7A8C"/>
+                </a:solidFill>
+              </a:rPr>
+              <a:t>a perfect gyro still fails</a:t>
+            </a:r>
+          </a:p>
+        </p:txBody>
+      </p:sp>
+      <p:sp>
+        <p:nvSpPr>
+          <p:cNvPr id="15368" name="TextBox 15367"/>
+          <p:cNvSpPr txBox="1"/>
+          <p:nvPr/>
+        </p:nvSpPr>
+        <p:spPr>
+          <a:xfrm>
+            <a:off x="4590288" y="4846320"/>
+            <a:ext cx="1920240" cy="960120"/>
+          </a:xfrm>
+          <a:prstGeom prst="rect">
+            <a:avLst/>
+          </a:prstGeom>
+          <a:noFill/>
+        </p:spPr>
+        <p:txBody>
+          <a:bodyPr wrap="square">
+            <a:spAutoFit/>
+          </a:bodyPr>
+          <a:lstStyle/>
+          <a:p>
+            <a:pPr>
+              <a:spcAft>
+                <a:spcPts val="100"/>
+              </a:spcAft>
+            </a:pPr>
+            <a:r>
+              <a:rPr sz="3000" b="1">
+                <a:solidFill>
+                  <a:srgbClr val="008A72"/>
+                </a:solidFill>
+              </a:rPr>
+              <a:t>98×</a:t>
+            </a:r>
+          </a:p>
+          <a:p>
+            <a:pPr>
+              <a:spcBef>
+                <a:spcPts val="0"/>
+              </a:spcBef>
+            </a:pPr>
+            <a:r>
+              <a:rPr sz="1050">
+                <a:solidFill>
+                  <a:srgbClr val="6B7A8C"/>
+                </a:solidFill>
+              </a:rPr>
+              <a:t>the 200 Hz edge requirement</a:t>
+            </a:r>
+          </a:p>
+        </p:txBody>
+      </p:sp>
     </p:spTree>
   </p:cSld>
   <p:clrMapOvr>
@@ -6416,72 +6582,14 @@
           <a:bodyPr/>
           <a:lstStyle/>
           <a:p>
-            <a:r>
-              <a:rPr sz="2500" b="1"/>
+            <a:pPr eaLnBrk="1" hangingPunct="1"/>
+            <a:r>
+              <a:rPr lang="en-US" sz="3600" b="1" dirty="0">
+                <a:latin typeface="Times New Roman" panose="02020603050405020304" pitchFamily="18" charset="0"/>
+                <a:ea typeface="ＭＳ Ｐゴシック" pitchFamily="1" charset="-128"/>
+                <a:cs typeface="Times New Roman" panose="02020603050405020304" pitchFamily="18" charset="0"/>
+              </a:rPr>
               <a:t>TECHNICAL APPROACH</a:t>
-            </a:r>
-          </a:p>
-        </p:txBody>
-      </p:sp>
-      <p:sp>
-        <p:nvSpPr>
-          <p:cNvPr id="17410" name="TextBox 8"/>
-          <p:cNvSpPr txBox="1">
-            <a:spLocks noChangeArrowheads="1"/>
-          </p:cNvSpPr>
-          <p:nvPr/>
-        </p:nvSpPr>
-        <p:spPr bwMode="auto">
-          <a:xfrm>
-            <a:off x="548640" y="1188720"/>
-            <a:ext cx="10881360" cy="1143000"/>
-          </a:xfrm>
-          <a:prstGeom prst="rect">
-            <a:avLst/>
-          </a:prstGeom>
-          <a:noFill/>
-          <a:ln w="9525">
-            <a:noFill/>
-            <a:miter lim="800000"/>
-            <a:headEnd/>
-            <a:tailEnd/>
-          </a:ln>
-        </p:spPr>
-        <p:txBody>
-          <a:bodyPr wrap="square">
-            <a:spAutoFit/>
-          </a:bodyPr>
-          <a:lstStyle/>
-          <a:p>
-            <a:pPr marL="342900" indent="-342900" algn="just">
-              <a:spcAft>
-                <a:spcPts val="400"/>
-              </a:spcAft>
-              <a:buFont typeface="Arial" panose="020B0604020202020204" pitchFamily="34" charset="0"/>
-              <a:buChar char="•"/>
-            </a:pPr>
-            <a:r>
-              <a:rPr sz="1300" b="1">
-                <a:solidFill>
-                  <a:srgbClr val="0B1F2A"/>
-                </a:solidFill>
-              </a:rPr>
-              <a:t>• Stack: Kotlin + Jetpack Compose · MapLibre + OpenStreetMap (no key, no billing) · ONNX Runtime Mobile · shared C++ core.</a:t>
-            </a:r>
-          </a:p>
-          <a:p>
-            <a:pPr>
-              <a:spcAft>
-                <a:spcPts val="400"/>
-              </a:spcAft>
-            </a:pPr>
-            <a:r>
-              <a:rPr sz="1300" b="1">
-                <a:solidFill>
-                  <a:srgbClr val="0B1F2A"/>
-                </a:solidFill>
-              </a:rPr>
-              <a:t>• Methods: AI speed model (AVNet-tiny) · gyro heading evidence · ZUPT · map-in-loop particle filter · HMM map-matching (Newson–Krumm).</a:t>
             </a:r>
           </a:p>
         </p:txBody>
@@ -6596,13 +6704,19 @@
           </a:fontRef>
         </p:style>
         <p:txBody>
-          <a:bodyPr rtlCol="0" anchor="ctr"/>
+          <a:bodyPr rtlCol="0" anchor="ctr" wrap="square"/>
           <a:lstStyle/>
           <a:p>
-            <a:r>
-              <a:rPr sz="900"/>
-              <a:t>[Team Name]</a:t>
-            </a:r>
+            <a:pPr algn="ctr"/>
+            <a:r>
+              <a:rPr sz="1050" b="1">
+                <a:solidFill>
+                  <a:srgbClr val="FFFFFF"/>
+                </a:solidFill>
+              </a:rPr>
+              <a:t>TEAM NAME</a:t>
+            </a:r>
+            <a:endParaRPr lang="en-IN" dirty="0"/>
           </a:p>
         </p:txBody>
       </p:sp>
@@ -6636,9 +6750,293 @@
           </a:prstGeom>
         </p:spPr>
       </p:pic>
+      <p:sp>
+        <p:nvSpPr>
+          <p:cNvPr id="17410" name="TextBox 17409"/>
+          <p:cNvSpPr txBox="1"/>
+          <p:nvPr/>
+        </p:nvSpPr>
+        <p:spPr>
+          <a:xfrm>
+            <a:off x="566928" y="1051560"/>
+            <a:ext cx="5394960" cy="3749039"/>
+          </a:xfrm>
+          <a:prstGeom prst="rect">
+            <a:avLst/>
+          </a:prstGeom>
+          <a:noFill/>
+        </p:spPr>
+        <p:txBody>
+          <a:bodyPr wrap="square">
+            <a:spAutoFit/>
+          </a:bodyPr>
+          <a:lstStyle/>
+          <a:p>
+            <a:pPr>
+              <a:spcBef>
+                <a:spcPts val="0"/>
+              </a:spcBef>
+              <a:spcAft>
+                <a:spcPts val="400"/>
+              </a:spcAft>
+            </a:pPr>
+            <a:r>
+              <a:rPr sz="1400" b="1" i="0">
+                <a:solidFill>
+                  <a:srgbClr val="0B1220"/>
+                </a:solidFill>
+              </a:rPr>
+              <a:t>COAST-VNet-1 — our speed model</a:t>
+            </a:r>
+          </a:p>
+          <a:p>
+            <a:pPr>
+              <a:spcBef>
+                <a:spcPts val="0"/>
+              </a:spcBef>
+              <a:spcAft>
+                <a:spcPts val="900"/>
+              </a:spcAft>
+            </a:pPr>
+            <a:r>
+              <a:rPr sz="1150" b="0" i="0">
+                <a:solidFill>
+                  <a:srgbClr val="2B3645"/>
+                </a:solidFill>
+              </a:rPr>
+              <a:t>96,086 parameters · 392 KB ONNX · runs on the phone. A frequency-decoupled CNN-GRU: the low band goes through a GRU as vehicle motion, the high band through a conv stack as road and engine vibration — the exact noise the problem statement names.</a:t>
+            </a:r>
+          </a:p>
+          <a:p>
+            <a:pPr>
+              <a:spcBef>
+                <a:spcPts val="0"/>
+              </a:spcBef>
+              <a:spcAft>
+                <a:spcPts val="1200"/>
+              </a:spcAft>
+            </a:pPr>
+            <a:r>
+              <a:rPr sz="1150" b="0" i="0">
+                <a:solidFill>
+                  <a:srgbClr val="2B3645"/>
+                </a:solidFill>
+              </a:rPr>
+              <a:t>Trained leave-file-out on IO-VNBD, labelled from the vehicle CAN bus rather than phone GNSS, so it never learns to imitate a noisy fix.</a:t>
+            </a:r>
+          </a:p>
+          <a:p>
+            <a:pPr>
+              <a:spcBef>
+                <a:spcPts val="600"/>
+              </a:spcBef>
+              <a:spcAft>
+                <a:spcPts val="400"/>
+              </a:spcAft>
+            </a:pPr>
+            <a:r>
+              <a:rPr sz="1400" b="1" i="0">
+                <a:solidFill>
+                  <a:srgbClr val="0B1220"/>
+                </a:solidFill>
+              </a:rPr>
+              <a:t>The estimation pipeline</a:t>
+            </a:r>
+          </a:p>
+          <a:p>
+            <a:pPr>
+              <a:spcBef>
+                <a:spcPts val="0"/>
+              </a:spcBef>
+              <a:spcAft>
+                <a:spcPts val="300"/>
+              </a:spcAft>
+            </a:pPr>
+            <a:r>
+              <a:rPr sz="1150" b="1">
+                <a:solidFill>
+                  <a:srgbClr val="008A72"/>
+                </a:solidFill>
+              </a:rPr>
+              <a:t>Align  </a:t>
+            </a:r>
+            <a:r>
+              <a:rPr sz="1150" b="0" i="0">
+                <a:solidFill>
+                  <a:srgbClr val="2B3645"/>
+                </a:solidFill>
+              </a:rPr>
+              <a:t>pitch/roll from gravity; mount yaw estimated on the move</a:t>
+            </a:r>
+          </a:p>
+          <a:p>
+            <a:pPr>
+              <a:spcBef>
+                <a:spcPts val="0"/>
+              </a:spcBef>
+              <a:spcAft>
+                <a:spcPts val="300"/>
+              </a:spcAft>
+            </a:pPr>
+            <a:r>
+              <a:rPr sz="1150" b="1">
+                <a:solidFill>
+                  <a:srgbClr val="008A72"/>
+                </a:solidFill>
+              </a:rPr>
+              <a:t>Filter  </a:t>
+            </a:r>
+            <a:r>
+              <a:rPr sz="1150" b="0" i="0">
+                <a:solidFill>
+                  <a:srgbClr val="2B3645"/>
+                </a:solidFill>
+              </a:rPr>
+              <a:t>gravity removed, then vibration split from motion</a:t>
+            </a:r>
+          </a:p>
+          <a:p>
+            <a:pPr>
+              <a:spcBef>
+                <a:spcPts val="0"/>
+              </a:spcBef>
+              <a:spcAft>
+                <a:spcPts val="300"/>
+              </a:spcAft>
+            </a:pPr>
+            <a:r>
+              <a:rPr sz="1150" b="1">
+                <a:solidFill>
+                  <a:srgbClr val="008A72"/>
+                </a:solidFill>
+              </a:rPr>
+              <a:t>Predict  </a:t>
+            </a:r>
+            <a:r>
+              <a:rPr sz="1150" b="0" i="0">
+                <a:solidFill>
+                  <a:srgbClr val="2B3645"/>
+                </a:solidFill>
+              </a:rPr>
+              <a:t>COAST-VNet-1 speed + gyro yaw + compass, ZUPT at rest</a:t>
+            </a:r>
+          </a:p>
+          <a:p>
+            <a:pPr>
+              <a:spcBef>
+                <a:spcPts val="0"/>
+              </a:spcBef>
+              <a:spcAft>
+                <a:spcPts val="300"/>
+              </a:spcAft>
+            </a:pPr>
+            <a:r>
+              <a:rPr sz="1150" b="1">
+                <a:solidFill>
+                  <a:srgbClr val="008A72"/>
+                </a:solidFill>
+              </a:rPr>
+              <a:t>Constrain  </a:t>
+            </a:r>
+            <a:r>
+              <a:rPr sz="1150" b="0" i="0">
+                <a:solidFill>
+                  <a:srgbClr val="2B3645"/>
+                </a:solidFill>
+              </a:rPr>
+              <a:t>particle filter over the OSM road graph, with NHC</a:t>
+            </a:r>
+          </a:p>
+          <a:p>
+            <a:pPr>
+              <a:spcBef>
+                <a:spcPts val="0"/>
+              </a:spcBef>
+              <a:spcAft>
+                <a:spcPts val="300"/>
+              </a:spcAft>
+            </a:pPr>
+            <a:r>
+              <a:rPr sz="1150" b="1">
+                <a:solidFill>
+                  <a:srgbClr val="008A72"/>
+                </a:solidFill>
+              </a:rPr>
+              <a:t>Fuse  </a:t>
+            </a:r>
+            <a:r>
+              <a:rPr sz="1150" b="0" i="0">
+                <a:solidFill>
+                  <a:srgbClr val="2B3645"/>
+                </a:solidFill>
+              </a:rPr>
+              <a:t>GNSS re-acquired in 100 ms, both directions</a:t>
+            </a:r>
+          </a:p>
+        </p:txBody>
+      </p:sp>
+      <p:sp>
+        <p:nvSpPr>
+          <p:cNvPr id="17411" name="TextBox 17410"/>
+          <p:cNvSpPr txBox="1"/>
+          <p:nvPr/>
+        </p:nvSpPr>
+        <p:spPr>
+          <a:xfrm>
+            <a:off x="566928" y="4983480"/>
+            <a:ext cx="5394960" cy="1097280"/>
+          </a:xfrm>
+          <a:prstGeom prst="rect">
+            <a:avLst/>
+          </a:prstGeom>
+          <a:noFill/>
+        </p:spPr>
+        <p:txBody>
+          <a:bodyPr wrap="square">
+            <a:spAutoFit/>
+          </a:bodyPr>
+          <a:lstStyle/>
+          <a:p>
+            <a:pPr>
+              <a:spcBef>
+                <a:spcPts val="0"/>
+              </a:spcBef>
+              <a:spcAft>
+                <a:spcPts val="400"/>
+              </a:spcAft>
+            </a:pPr>
+            <a:r>
+              <a:rPr sz="1200" b="1" i="0">
+                <a:solidFill>
+                  <a:srgbClr val="0B1220"/>
+                </a:solidFill>
+              </a:rPr>
+              <a:t>Stack</a:t>
+            </a:r>
+          </a:p>
+          <a:p>
+            <a:pPr>
+              <a:spcBef>
+                <a:spcPts val="0"/>
+              </a:spcBef>
+              <a:spcAft>
+                <a:spcPts val="400"/>
+              </a:spcAft>
+            </a:pPr>
+            <a:r>
+              <a:rPr sz="1100" b="0" i="0">
+                <a:solidFill>
+                  <a:srgbClr val="2B3645"/>
+                </a:solidFill>
+              </a:rPr>
+              <a:t>Kotlin · Jetpack Compose · ONNX Runtime Mobile · MapLibre + OpenStreetMap (no API key, no billing) · shared C++ core → phone, WASM and a headless edge daemon · PyTorch for training.</a:t>
+            </a:r>
+          </a:p>
+        </p:txBody>
+      </p:sp>
       <p:pic>
         <p:nvPicPr>
-          <p:cNvPr id="17411" name="Picture 17410" descr="architecture.png"/>
+          <p:cNvPr id="17412" name="Picture 17411" descr="architecture.png"/>
           <p:cNvPicPr>
             <a:picLocks noChangeAspect="1"/>
           </p:cNvPicPr>
@@ -6652,14 +7050,73 @@
         </p:blipFill>
         <p:spPr>
           <a:xfrm>
-            <a:off x="1770790" y="2468880"/>
-            <a:ext cx="8647371" cy="3794760"/>
+            <a:off x="6217920" y="1051560"/>
+            <a:ext cx="5577840" cy="2447745"/>
           </a:xfrm>
           <a:prstGeom prst="rect">
             <a:avLst/>
           </a:prstGeom>
         </p:spPr>
       </p:pic>
+      <p:sp>
+        <p:nvSpPr>
+          <p:cNvPr id="17413" name="TextBox 17412"/>
+          <p:cNvSpPr txBox="1"/>
+          <p:nvPr/>
+        </p:nvSpPr>
+        <p:spPr>
+          <a:xfrm>
+            <a:off x="6217920" y="4892040"/>
+            <a:ext cx="5577840" cy="1188720"/>
+          </a:xfrm>
+          <a:prstGeom prst="rect">
+            <a:avLst/>
+          </a:prstGeom>
+          <a:noFill/>
+        </p:spPr>
+        <p:txBody>
+          <a:bodyPr wrap="square">
+            <a:spAutoFit/>
+          </a:bodyPr>
+          <a:lstStyle/>
+          <a:p>
+            <a:pPr>
+              <a:spcBef>
+                <a:spcPts val="0"/>
+              </a:spcBef>
+              <a:spcAft>
+                <a:spcPts val="400"/>
+              </a:spcAft>
+            </a:pPr>
+            <a:r>
+              <a:rPr sz="1200" b="1" i="0">
+                <a:solidFill>
+                  <a:srgbClr val="0B1220"/>
+                </a:solidFill>
+              </a:rPr>
+              <a:t>Why a particle filter, not a Kalman filter</a:t>
+            </a:r>
+          </a:p>
+          <a:p>
+            <a:pPr>
+              <a:spcBef>
+                <a:spcPts val="0"/>
+              </a:spcBef>
+              <a:spcAft>
+                <a:spcPts val="400"/>
+              </a:spcAft>
+            </a:pPr>
+            <a:r>
+              <a:rPr sz="1100" b="0" i="0">
+                <a:solidFill>
+                  <a:srgbClr val="2B3645"/>
+                </a:solidFill>
+              </a:rPr>
+              <a:t>At a junction the belief is genuinely multi-modal — you may be on either road. A single Gaussian must collapse that to one answer exactly when the ambiguity matters most. Particles carry both hypotheses until the motion resolves them.</a:t>
+            </a:r>
+          </a:p>
+        </p:txBody>
+      </p:sp>
     </p:spTree>
   </p:cSld>
   <p:clrMapOvr>
@@ -6779,96 +7236,14 @@
           <a:bodyPr/>
           <a:lstStyle/>
           <a:p>
-            <a:r>
-              <a:rPr sz="2500" b="1"/>
+            <a:pPr eaLnBrk="1" hangingPunct="1"/>
+            <a:r>
+              <a:rPr lang="en-US" sz="3600" b="1" dirty="0">
+                <a:latin typeface="Times New Roman" panose="02020603050405020304" pitchFamily="18" charset="0"/>
+                <a:ea typeface="ＭＳ Ｐゴシック" pitchFamily="1" charset="-128"/>
+                <a:cs typeface="Times New Roman" panose="02020603050405020304" pitchFamily="18" charset="0"/>
+              </a:rPr>
               <a:t>FEASIBILITY AND VIABILITY</a:t>
-            </a:r>
-          </a:p>
-        </p:txBody>
-      </p:sp>
-      <p:sp>
-        <p:nvSpPr>
-          <p:cNvPr id="17410" name="TextBox 8"/>
-          <p:cNvSpPr txBox="1">
-            <a:spLocks noChangeArrowheads="1"/>
-          </p:cNvSpPr>
-          <p:nvPr/>
-        </p:nvSpPr>
-        <p:spPr bwMode="auto">
-          <a:xfrm>
-            <a:off x="457200" y="1143000"/>
-            <a:ext cx="11247120" cy="1143000"/>
-          </a:xfrm>
-          <a:prstGeom prst="rect">
-            <a:avLst/>
-          </a:prstGeom>
-          <a:noFill/>
-          <a:ln w="9525">
-            <a:noFill/>
-            <a:miter lim="800000"/>
-            <a:headEnd/>
-            <a:tailEnd/>
-          </a:ln>
-        </p:spPr>
-        <p:txBody>
-          <a:bodyPr wrap="square">
-            <a:spAutoFit/>
-          </a:bodyPr>
-          <a:lstStyle/>
-          <a:p>
-            <a:pPr marL="342900" marR="0" indent="-342900" algn="just" defTabSz="457200" rtl="0" eaLnBrk="1" fontAlgn="base" latinLnBrk="0" hangingPunct="1">
-              <a:lnSpc>
-                <a:spcPct val="100000"/>
-              </a:lnSpc>
-              <a:spcBef>
-                <a:spcPct val="0"/>
-              </a:spcBef>
-              <a:spcAft>
-                <a:spcPts val="400"/>
-              </a:spcAft>
-              <a:buClrTx/>
-              <a:buSzTx/>
-              <a:buFont typeface="Arial" panose="020B0604020202020204" pitchFamily="34" charset="0"/>
-              <a:buChar char="•"/>
-              <a:tabLst/>
-              <a:defRPr/>
-            </a:pPr>
-            <a:r>
-              <a:rPr sz="1250" b="1">
-                <a:solidFill>
-                  <a:srgbClr val="0B1F2A"/>
-                </a:solidFill>
-              </a:rPr>
-              <a:t>• Feasible today: runs on any phone people already own; fully offline; edge engine already 600× the required 200 Hz.</a:t>
-            </a:r>
-            <a:endParaRPr kumimoji="0" lang="en-US" sz="2800" b="0" i="0" u="none" strike="noStrike" kern="1200" cap="none" spc="0" normalizeH="0" baseline="0" noProof="0" dirty="0">
-              <a:ln>
-                <a:noFill/>
-              </a:ln>
-              <a:solidFill>
-                <a:prstClr val="black"/>
-              </a:solidFill>
-              <a:effectLst/>
-              <a:uLnTx/>
-              <a:uFillTx/>
-              <a:latin typeface="Arial" pitchFamily="34" charset="0"/>
-              <a:ea typeface="ＭＳ Ｐゴシック" pitchFamily="1" charset="-128"/>
-              <a:cs typeface="Arial" pitchFamily="34" charset="0"/>
-            </a:endParaRPr>
-          </a:p>
-          <a:p>
-            <a:pPr>
-              <a:spcAft>
-                <a:spcPts val="400"/>
-              </a:spcAft>
-            </a:pPr>
-            <a:r>
-              <a:rPr sz="1250" b="1">
-                <a:solidFill>
-                  <a:srgbClr val="0B1F2A"/>
-                </a:solidFill>
-              </a:rPr>
-              <a:t>• Risk: heading drift dominates; hardest tunnel bar not yet cleared end-to-end. Strategy: map-in-loop (done, 2.02×) → online alignment → calibrated uncertainty → field logs.</a:t>
             </a:r>
           </a:p>
         </p:txBody>
@@ -7066,13 +7441,19 @@
           </a:fontRef>
         </p:style>
         <p:txBody>
-          <a:bodyPr rtlCol="0" anchor="ctr"/>
+          <a:bodyPr rtlCol="0" anchor="ctr" wrap="square"/>
           <a:lstStyle/>
           <a:p>
-            <a:r>
-              <a:rPr sz="900"/>
-              <a:t>[Team Name]</a:t>
-            </a:r>
+            <a:pPr algn="ctr"/>
+            <a:r>
+              <a:rPr sz="1050" b="1">
+                <a:solidFill>
+                  <a:srgbClr val="FFFFFF"/>
+                </a:solidFill>
+              </a:rPr>
+              <a:t>TEAM NAME</a:t>
+            </a:r>
+            <a:endParaRPr lang="en-IN" dirty="0"/>
           </a:p>
         </p:txBody>
       </p:sp>
@@ -7106,30 +7487,487 @@
           </a:prstGeom>
         </p:spPr>
       </p:pic>
-      <p:pic>
-        <p:nvPicPr>
-          <p:cNvPr id="17411" name="Picture 17410" descr="results.png"/>
-          <p:cNvPicPr>
-            <a:picLocks noChangeAspect="1"/>
-          </p:cNvPicPr>
+      <p:sp>
+        <p:nvSpPr>
+          <p:cNvPr id="17410" name="TextBox 17409"/>
+          <p:cNvSpPr txBox="1"/>
           <p:nvPr/>
-        </p:nvPicPr>
-        <p:blipFill>
-          <a:blip r:embed="rId4"/>
-          <a:stretch>
-            <a:fillRect/>
-          </a:stretch>
-        </p:blipFill>
+        </p:nvSpPr>
         <p:spPr>
           <a:xfrm>
-            <a:off x="1274927" y="2468880"/>
-            <a:ext cx="9639096" cy="3794760"/>
+            <a:off x="566928" y="1051560"/>
+            <a:ext cx="5486400" cy="2651760"/>
           </a:xfrm>
           <a:prstGeom prst="rect">
             <a:avLst/>
           </a:prstGeom>
+          <a:noFill/>
         </p:spPr>
-      </p:pic>
+        <p:txBody>
+          <a:bodyPr wrap="square">
+            <a:spAutoFit/>
+          </a:bodyPr>
+          <a:lstStyle/>
+          <a:p>
+            <a:pPr>
+              <a:spcBef>
+                <a:spcPts val="0"/>
+              </a:spcBef>
+              <a:spcAft>
+                <a:spcPts val="400"/>
+              </a:spcAft>
+            </a:pPr>
+            <a:r>
+              <a:rPr sz="1400" b="1" i="0">
+                <a:solidFill>
+                  <a:srgbClr val="0B1220"/>
+                </a:solidFill>
+              </a:rPr>
+              <a:t>Feasible because it needs nothing that does not already exist</a:t>
+            </a:r>
+          </a:p>
+          <a:p>
+            <a:pPr>
+              <a:spcAft>
+                <a:spcPts val="400"/>
+              </a:spcAft>
+            </a:pPr>
+            <a:r>
+              <a:rPr sz="1150">
+                <a:solidFill>
+                  <a:srgbClr val="6B7A8C"/>
+                </a:solidFill>
+              </a:rPr>
+              <a:t>Extra hardware   </a:t>
+            </a:r>
+            <a:r>
+              <a:rPr sz="1150" b="1">
+                <a:solidFill>
+                  <a:srgbClr val="0B1220"/>
+                </a:solidFill>
+              </a:rPr>
+              <a:t>None — any phone with an IMU</a:t>
+            </a:r>
+          </a:p>
+          <a:p>
+            <a:pPr>
+              <a:spcAft>
+                <a:spcPts val="400"/>
+              </a:spcAft>
+            </a:pPr>
+            <a:r>
+              <a:rPr sz="1150">
+                <a:solidFill>
+                  <a:srgbClr val="6B7A8C"/>
+                </a:solidFill>
+              </a:rPr>
+              <a:t>Map licence / API key   </a:t>
+            </a:r>
+            <a:r>
+              <a:rPr sz="1150" b="1">
+                <a:solidFill>
+                  <a:srgbClr val="0B1220"/>
+                </a:solidFill>
+              </a:rPr>
+              <a:t>None — OpenStreetMap, offline</a:t>
+            </a:r>
+          </a:p>
+          <a:p>
+            <a:pPr>
+              <a:spcAft>
+                <a:spcPts val="400"/>
+              </a:spcAft>
+            </a:pPr>
+            <a:r>
+              <a:rPr sz="1150">
+                <a:solidFill>
+                  <a:srgbClr val="6B7A8C"/>
+                </a:solidFill>
+              </a:rPr>
+              <a:t>Network at runtime   </a:t>
+            </a:r>
+            <a:r>
+              <a:rPr sz="1150" b="1">
+                <a:solidFill>
+                  <a:srgbClr val="0B1220"/>
+                </a:solidFill>
+              </a:rPr>
+              <a:t>None — inference is on-device</a:t>
+            </a:r>
+          </a:p>
+          <a:p>
+            <a:pPr>
+              <a:spcAft>
+                <a:spcPts val="400"/>
+              </a:spcAft>
+            </a:pPr>
+            <a:r>
+              <a:rPr sz="1150">
+                <a:solidFill>
+                  <a:srgbClr val="6B7A8C"/>
+                </a:solidFill>
+              </a:rPr>
+              <a:t>Cloud infrastructure   </a:t>
+            </a:r>
+            <a:r>
+              <a:rPr sz="1150" b="1">
+                <a:solidFill>
+                  <a:srgbClr val="0B1220"/>
+                </a:solidFill>
+              </a:rPr>
+              <a:t>None — zero marginal cost per user</a:t>
+            </a:r>
+          </a:p>
+          <a:p>
+            <a:pPr>
+              <a:spcAft>
+                <a:spcPts val="400"/>
+              </a:spcAft>
+            </a:pPr>
+            <a:r>
+              <a:rPr sz="1150">
+                <a:solidFill>
+                  <a:srgbClr val="6B7A8C"/>
+                </a:solidFill>
+              </a:rPr>
+              <a:t>User account   </a:t>
+            </a:r>
+            <a:r>
+              <a:rPr sz="1150" b="1">
+                <a:solidFill>
+                  <a:srgbClr val="0B1220"/>
+                </a:solidFill>
+              </a:rPr>
+              <a:t>None — no identity is collected</a:t>
+            </a:r>
+          </a:p>
+        </p:txBody>
+      </p:sp>
+      <p:sp>
+        <p:nvSpPr>
+          <p:cNvPr id="17411" name="TextBox 17410"/>
+          <p:cNvSpPr txBox="1"/>
+          <p:nvPr/>
+        </p:nvSpPr>
+        <p:spPr>
+          <a:xfrm>
+            <a:off x="566928" y="3794760"/>
+            <a:ext cx="5486400" cy="2286000"/>
+          </a:xfrm>
+          <a:prstGeom prst="rect">
+            <a:avLst/>
+          </a:prstGeom>
+          <a:noFill/>
+        </p:spPr>
+        <p:txBody>
+          <a:bodyPr wrap="square">
+            <a:spAutoFit/>
+          </a:bodyPr>
+          <a:lstStyle/>
+          <a:p>
+            <a:pPr>
+              <a:spcBef>
+                <a:spcPts val="0"/>
+              </a:spcBef>
+              <a:spcAft>
+                <a:spcPts val="400"/>
+              </a:spcAft>
+            </a:pPr>
+            <a:r>
+              <a:rPr sz="1400" b="1" i="0">
+                <a:solidFill>
+                  <a:srgbClr val="0B1220"/>
+                </a:solidFill>
+              </a:rPr>
+              <a:t>Scales in three directions</a:t>
+            </a:r>
+          </a:p>
+          <a:p>
+            <a:pPr>
+              <a:spcBef>
+                <a:spcPts val="0"/>
+              </a:spcBef>
+              <a:spcAft>
+                <a:spcPts val="500"/>
+              </a:spcAft>
+            </a:pPr>
+            <a:r>
+              <a:rPr sz="1150" b="1">
+                <a:solidFill>
+                  <a:srgbClr val="008A72"/>
+                </a:solidFill>
+              </a:rPr>
+              <a:t>→  </a:t>
+            </a:r>
+            <a:r>
+              <a:rPr sz="1150" b="0" i="0">
+                <a:solidFill>
+                  <a:srgbClr val="2B3645"/>
+                </a:solidFill>
+              </a:rPr>
+              <a:t>Device — one C++ core runs 10 Hz on a phone and 19,682 Hz headless in its worst measured configuration, 98× the 200 Hz edge requirement.</a:t>
+            </a:r>
+          </a:p>
+          <a:p>
+            <a:pPr>
+              <a:spcBef>
+                <a:spcPts val="0"/>
+              </a:spcBef>
+              <a:spcAft>
+                <a:spcPts val="500"/>
+              </a:spcAft>
+            </a:pPr>
+            <a:r>
+              <a:rPr sz="1150" b="1">
+                <a:solidFill>
+                  <a:srgbClr val="008A72"/>
+                </a:solidFill>
+              </a:rPr>
+              <a:t>→  </a:t>
+            </a:r>
+            <a:r>
+              <a:rPr sz="1150" b="0" i="0">
+                <a:solidFill>
+                  <a:srgbClr val="2B3645"/>
+                </a:solidFill>
+              </a:rPr>
+              <a:t>Geography — OpenStreetMap covers the planet. Adding a city is a data step, not an engineering one.</a:t>
+            </a:r>
+          </a:p>
+          <a:p>
+            <a:pPr>
+              <a:spcBef>
+                <a:spcPts val="0"/>
+              </a:spcBef>
+              <a:spcAft>
+                <a:spcPts val="400"/>
+              </a:spcAft>
+            </a:pPr>
+            <a:r>
+              <a:rPr sz="1150" b="1">
+                <a:solidFill>
+                  <a:srgbClr val="008A72"/>
+                </a:solidFill>
+              </a:rPr>
+              <a:t>→  </a:t>
+            </a:r>
+            <a:r>
+              <a:rPr sz="1150" b="0" i="0">
+                <a:solidFill>
+                  <a:srgbClr val="2B3645"/>
+                </a:solidFill>
+              </a:rPr>
+              <a:t>Domain — the constraint is a plug-in. The algorithm never knew it was a road; a rail track or a shipping channel is another implementation.</a:t>
+            </a:r>
+          </a:p>
+        </p:txBody>
+      </p:sp>
+      <p:sp>
+        <p:nvSpPr>
+          <p:cNvPr id="17412" name="TextBox 17411"/>
+          <p:cNvSpPr txBox="1"/>
+          <p:nvPr/>
+        </p:nvSpPr>
+        <p:spPr>
+          <a:xfrm>
+            <a:off x="6400800" y="1051560"/>
+            <a:ext cx="5394960" cy="4937760"/>
+          </a:xfrm>
+          <a:prstGeom prst="rect">
+            <a:avLst/>
+          </a:prstGeom>
+          <a:noFill/>
+        </p:spPr>
+        <p:txBody>
+          <a:bodyPr wrap="square">
+            <a:spAutoFit/>
+          </a:bodyPr>
+          <a:lstStyle/>
+          <a:p>
+            <a:pPr>
+              <a:spcBef>
+                <a:spcPts val="0"/>
+              </a:spcBef>
+              <a:spcAft>
+                <a:spcPts val="400"/>
+              </a:spcAft>
+            </a:pPr>
+            <a:r>
+              <a:rPr sz="1400" b="1" i="0">
+                <a:solidFill>
+                  <a:srgbClr val="0B1220"/>
+                </a:solidFill>
+              </a:rPr>
+              <a:t>Risks, and what we did about them</a:t>
+            </a:r>
+          </a:p>
+          <a:p>
+            <a:pPr>
+              <a:spcBef>
+                <a:spcPts val="700"/>
+              </a:spcBef>
+              <a:spcAft>
+                <a:spcPts val="200"/>
+              </a:spcAft>
+            </a:pPr>
+            <a:r>
+              <a:rPr sz="1150" b="1">
+                <a:solidFill>
+                  <a:srgbClr val="008A72"/>
+                </a:solidFill>
+              </a:rPr>
+              <a:t>Heading drift is the hard part</a:t>
+            </a:r>
+          </a:p>
+          <a:p>
+            <a:pPr>
+              <a:spcAft>
+                <a:spcPts val="0"/>
+              </a:spcAft>
+            </a:pPr>
+            <a:r>
+              <a:rPr sz="1100">
+                <a:solidFill>
+                  <a:srgbClr val="2B3645"/>
+                </a:solidFill>
+              </a:rPr>
+              <a:t>We proved a perfect gyro is not enough (55% still fail), which is why the map is in the loop rather than a better sensor.</a:t>
+            </a:r>
+          </a:p>
+          <a:p>
+            <a:pPr>
+              <a:spcBef>
+                <a:spcPts val="700"/>
+              </a:spcBef>
+              <a:spcAft>
+                <a:spcPts val="200"/>
+              </a:spcAft>
+            </a:pPr>
+            <a:r>
+              <a:rPr sz="1150" b="1">
+                <a:solidFill>
+                  <a:srgbClr val="008A72"/>
+                </a:solidFill>
+              </a:rPr>
+              <a:t>Consumer IMUs are noisy and biased</a:t>
+            </a:r>
+          </a:p>
+          <a:p>
+            <a:pPr>
+              <a:spcAft>
+                <a:spcPts val="0"/>
+              </a:spcAft>
+            </a:pPr>
+            <a:r>
+              <a:rPr sz="1100">
+                <a:solidFill>
+                  <a:srgbClr val="2B3645"/>
+                </a:solidFill>
+              </a:rPr>
+              <a:t>Gravity removed before integration; vibration separated from motion in the model; zero-velocity updates at rest.</a:t>
+            </a:r>
+          </a:p>
+          <a:p>
+            <a:pPr>
+              <a:spcBef>
+                <a:spcPts val="700"/>
+              </a:spcBef>
+              <a:spcAft>
+                <a:spcPts val="200"/>
+              </a:spcAft>
+            </a:pPr>
+            <a:r>
+              <a:rPr sz="1150" b="1">
+                <a:solidFill>
+                  <a:srgbClr val="008A72"/>
+                </a:solidFill>
+              </a:rPr>
+              <a:t>Phone mount varies</a:t>
+            </a:r>
+          </a:p>
+          <a:p>
+            <a:pPr>
+              <a:spcAft>
+                <a:spcPts val="0"/>
+              </a:spcAft>
+            </a:pPr>
+            <a:r>
+              <a:rPr sz="1100">
+                <a:solidFill>
+                  <a:srgbClr val="2B3645"/>
+                </a:solidFill>
+              </a:rPr>
+              <a:t>Gravity-axis canonicalisation cut mount-swap degradation by ~63% in ablation. Yaw-to-vehicle remains our open problem, and we say so.</a:t>
+            </a:r>
+          </a:p>
+          <a:p>
+            <a:pPr>
+              <a:spcBef>
+                <a:spcPts val="700"/>
+              </a:spcBef>
+              <a:spcAft>
+                <a:spcPts val="200"/>
+              </a:spcAft>
+            </a:pPr>
+            <a:r>
+              <a:rPr sz="1150" b="1">
+                <a:solidFill>
+                  <a:srgbClr val="C2393D"/>
+                </a:solidFill>
+              </a:rPr>
+              <a:t>We do not yet meet the &lt;10% drift bar</a:t>
+            </a:r>
+          </a:p>
+          <a:p>
+            <a:pPr>
+              <a:spcAft>
+                <a:spcPts val="0"/>
+              </a:spcAft>
+            </a:pPr>
+            <a:r>
+              <a:rPr sz="1100">
+                <a:solidFill>
+                  <a:srgbClr val="2B3645"/>
+                </a:solidFill>
+              </a:rPr>
+              <a:t>We are at 16.8% against a 27.6% baseline — roughly half the gap closed, with a measured route to the rest.</a:t>
+            </a:r>
+          </a:p>
+          <a:p>
+            <a:pPr>
+              <a:spcBef>
+                <a:spcPts val="700"/>
+              </a:spcBef>
+              <a:spcAft>
+                <a:spcPts val="200"/>
+              </a:spcAft>
+            </a:pPr>
+            <a:r>
+              <a:rPr sz="1150" b="1">
+                <a:solidFill>
+                  <a:srgbClr val="C2393D"/>
+                </a:solidFill>
+              </a:rPr>
+              <a:t>Our uncertainty estimate is not trustworthy</a:t>
+            </a:r>
+          </a:p>
+          <a:p>
+            <a:pPr>
+              <a:spcAft>
+                <a:spcPts val="0"/>
+              </a:spcAft>
+            </a:pPr>
+            <a:r>
+              <a:rPr sz="1100">
+                <a:solidFill>
+                  <a:srgbClr val="2B3645"/>
+                </a:solidFill>
+              </a:rPr>
+              <a:t>It correlates −0.23 with real error, so we hide it rather than show a number we cannot stand behind.</a:t>
+            </a:r>
+          </a:p>
+        </p:txBody>
+      </p:sp>
     </p:spTree>
     <p:extLst>
       <p:ext uri="{BB962C8B-B14F-4D97-AF65-F5344CB8AC3E}">
@@ -7254,127 +8092,14 @@
           <a:bodyPr/>
           <a:lstStyle/>
           <a:p>
-            <a:r>
-              <a:rPr sz="2500" b="1"/>
+            <a:pPr eaLnBrk="1" hangingPunct="1"/>
+            <a:r>
+              <a:rPr lang="en-US" sz="3600" b="1" dirty="0">
+                <a:latin typeface="Times New Roman" panose="02020603050405020304" pitchFamily="18" charset="0"/>
+                <a:ea typeface="ＭＳ Ｐゴシック" pitchFamily="1" charset="-128"/>
+                <a:cs typeface="Times New Roman" panose="02020603050405020304" pitchFamily="18" charset="0"/>
+              </a:rPr>
               <a:t>IMPACT AND BENEFITS</a:t>
-            </a:r>
-          </a:p>
-        </p:txBody>
-      </p:sp>
-      <p:sp>
-        <p:nvSpPr>
-          <p:cNvPr id="17410" name="TextBox 8"/>
-          <p:cNvSpPr txBox="1">
-            <a:spLocks noChangeArrowheads="1"/>
-          </p:cNvSpPr>
-          <p:nvPr/>
-        </p:nvSpPr>
-        <p:spPr bwMode="auto">
-          <a:xfrm>
-            <a:off x="548640" y="1371600"/>
-            <a:ext cx="11064240" cy="4480560"/>
-          </a:xfrm>
-          <a:prstGeom prst="rect">
-            <a:avLst/>
-          </a:prstGeom>
-          <a:noFill/>
-          <a:ln w="9525">
-            <a:noFill/>
-            <a:miter lim="800000"/>
-            <a:headEnd/>
-            <a:tailEnd/>
-          </a:ln>
-        </p:spPr>
-        <p:txBody>
-          <a:bodyPr wrap="square">
-            <a:spAutoFit/>
-          </a:bodyPr>
-          <a:lstStyle/>
-          <a:p>
-            <a:pPr marL="342900" marR="0" indent="-342900" algn="just" defTabSz="457200" rtl="0" eaLnBrk="1" fontAlgn="base" latinLnBrk="0" hangingPunct="1">
-              <a:lnSpc>
-                <a:spcPct val="100000"/>
-              </a:lnSpc>
-              <a:spcBef>
-                <a:spcPct val="0"/>
-              </a:spcBef>
-              <a:spcAft>
-                <a:spcPts val="400"/>
-              </a:spcAft>
-              <a:buClrTx/>
-              <a:buSzTx/>
-              <a:buFont typeface="Arial" panose="020B0604020202020204" pitchFamily="34" charset="0"/>
-              <a:buChar char="•"/>
-              <a:tabLst/>
-              <a:defRPr/>
-            </a:pPr>
-            <a:r>
-              <a:rPr sz="1500" b="1">
-                <a:solidFill>
-                  <a:srgbClr val="0B1F2A"/>
-                </a:solidFill>
-              </a:rPr>
-              <a:t>• Who: 200M+ two-wheelers, trucks &amp; older cars; logistics, ride-hailing, quick-commerce, ambulances, metro riders.</a:t>
-            </a:r>
-          </a:p>
-          <a:p>
-            <a:pPr lvl="1">
-              <a:spcAft>
-                <a:spcPts val="400"/>
-              </a:spcAft>
-            </a:pPr>
-            <a:r>
-              <a:rPr sz="1400" b="0">
-                <a:solidFill>
-                  <a:srgbClr val="5C6B73"/>
-                </a:solidFill>
-              </a:rPr>
-              <a:t>– Social: the dot keeps moving underground — safer routing, honest ETAs, ambulances that don't lose the map.</a:t>
-            </a:r>
-          </a:p>
-          <a:p>
-            <a:pPr lvl="1">
-              <a:spcAft>
-                <a:spcPts val="400"/>
-              </a:spcAft>
-            </a:pPr>
-            <a:r>
-              <a:rPr sz="1400" b="0">
-                <a:solidFill>
-                  <a:srgbClr val="5C6B73"/>
-                </a:solidFill>
-              </a:rPr>
-              <a:t>– Economic: ₹0 extra hardware, no cloud, no API bills — works on existing phones; SDK licensing to OEMs &amp; fleets.</a:t>
-            </a:r>
-          </a:p>
-          <a:p>
-            <a:pPr lvl="1">
-              <a:spcAft>
-                <a:spcPts val="400"/>
-              </a:spcAft>
-            </a:pPr>
-            <a:r>
-              <a:rPr sz="1400" b="0">
-                <a:solidFill>
-                  <a:srgbClr val="5C6B73"/>
-                </a:solidFill>
-              </a:rPr>
-              <a:t>– Environmental: no added device (no e-waste), no cloud compute energy.</a:t>
-            </a:r>
-          </a:p>
-          <a:p>
-            <a:pPr>
-              <a:spcAft>
-                <a:spcPts val="400"/>
-              </a:spcAft>
-            </a:pPr>
-            <a:r>
-              <a:rPr sz="1500" b="1">
-                <a:solidFill>
-                  <a:srgbClr val="0B1F2A"/>
-                </a:solidFill>
-              </a:rPr>
-              <a:t>• Strategic (why ISRO): GNSS jamming/spoofing is a sovereignty issue — NavIC + inertial nav is the answer stack; the same discipline ISRO flies on launch vehicles, on a ₹15,000 phone.</a:t>
             </a:r>
           </a:p>
         </p:txBody>
@@ -7572,13 +8297,19 @@
           </a:fontRef>
         </p:style>
         <p:txBody>
-          <a:bodyPr rtlCol="0" anchor="ctr"/>
+          <a:bodyPr rtlCol="0" anchor="ctr" wrap="square"/>
           <a:lstStyle/>
           <a:p>
-            <a:r>
-              <a:rPr sz="900"/>
-              <a:t>[Team Name]</a:t>
-            </a:r>
+            <a:pPr algn="ctr"/>
+            <a:r>
+              <a:rPr sz="1050" b="1">
+                <a:solidFill>
+                  <a:srgbClr val="FFFFFF"/>
+                </a:solidFill>
+              </a:rPr>
+              <a:t>TEAM NAME</a:t>
+            </a:r>
+            <a:endParaRPr lang="en-IN" dirty="0"/>
           </a:p>
         </p:txBody>
       </p:sp>
@@ -7612,6 +8343,583 @@
           </a:prstGeom>
         </p:spPr>
       </p:pic>
+      <p:sp>
+        <p:nvSpPr>
+          <p:cNvPr id="17410" name="TextBox 17409"/>
+          <p:cNvSpPr txBox="1"/>
+          <p:nvPr/>
+        </p:nvSpPr>
+        <p:spPr>
+          <a:xfrm>
+            <a:off x="566928" y="1051560"/>
+            <a:ext cx="5577840" cy="1280160"/>
+          </a:xfrm>
+          <a:prstGeom prst="rect">
+            <a:avLst/>
+          </a:prstGeom>
+          <a:noFill/>
+        </p:spPr>
+        <p:txBody>
+          <a:bodyPr wrap="square">
+            <a:spAutoFit/>
+          </a:bodyPr>
+          <a:lstStyle/>
+          <a:p>
+            <a:pPr>
+              <a:spcBef>
+                <a:spcPts val="0"/>
+              </a:spcBef>
+              <a:spcAft>
+                <a:spcPts val="400"/>
+              </a:spcAft>
+            </a:pPr>
+            <a:r>
+              <a:rPr sz="1400" b="1" i="0">
+                <a:solidFill>
+                  <a:srgbClr val="0B1220"/>
+                </a:solidFill>
+              </a:rPr>
+              <a:t>The vehicles nobody built a fallback for</a:t>
+            </a:r>
+          </a:p>
+          <a:p>
+            <a:pPr>
+              <a:spcBef>
+                <a:spcPts val="0"/>
+              </a:spcBef>
+              <a:spcAft>
+                <a:spcPts val="400"/>
+              </a:spcAft>
+            </a:pPr>
+            <a:r>
+              <a:rPr sz="1150" b="0" i="0">
+                <a:solidFill>
+                  <a:srgbClr val="2B3645"/>
+                </a:solidFill>
+              </a:rPr>
+              <a:t>Premium cars ship with wheel-connected inertial navigation. Trucks, older cars and India's two-wheeler fleet do not — they rely entirely on the phone on the dashboard. That is who this is for.</a:t>
+            </a:r>
+          </a:p>
+        </p:txBody>
+      </p:sp>
+      <p:sp>
+        <p:nvSpPr>
+          <p:cNvPr id="17411" name="TextBox 17410"/>
+          <p:cNvSpPr txBox="1"/>
+          <p:nvPr/>
+        </p:nvSpPr>
+        <p:spPr>
+          <a:xfrm>
+            <a:off x="566928" y="2423160"/>
+            <a:ext cx="1828800" cy="960120"/>
+          </a:xfrm>
+          <a:prstGeom prst="rect">
+            <a:avLst/>
+          </a:prstGeom>
+          <a:noFill/>
+        </p:spPr>
+        <p:txBody>
+          <a:bodyPr wrap="square">
+            <a:spAutoFit/>
+          </a:bodyPr>
+          <a:lstStyle/>
+          <a:p>
+            <a:pPr>
+              <a:spcAft>
+                <a:spcPts val="100"/>
+              </a:spcAft>
+            </a:pPr>
+            <a:r>
+              <a:rPr sz="3000" b="1">
+                <a:solidFill>
+                  <a:srgbClr val="008A72"/>
+                </a:solidFill>
+              </a:rPr>
+              <a:t>1.96 crore</a:t>
+            </a:r>
+          </a:p>
+          <a:p>
+            <a:pPr>
+              <a:spcBef>
+                <a:spcPts val="0"/>
+              </a:spcBef>
+            </a:pPr>
+            <a:r>
+              <a:rPr sz="1050">
+                <a:solidFill>
+                  <a:srgbClr val="6B7A8C"/>
+                </a:solidFill>
+              </a:rPr>
+              <a:t>two-wheelers sold in India, FY2024-25</a:t>
+            </a:r>
+          </a:p>
+        </p:txBody>
+      </p:sp>
+      <p:sp>
+        <p:nvSpPr>
+          <p:cNvPr id="17412" name="TextBox 17411"/>
+          <p:cNvSpPr txBox="1"/>
+          <p:nvPr/>
+        </p:nvSpPr>
+        <p:spPr>
+          <a:xfrm>
+            <a:off x="2441448" y="2423160"/>
+            <a:ext cx="1828800" cy="960120"/>
+          </a:xfrm>
+          <a:prstGeom prst="rect">
+            <a:avLst/>
+          </a:prstGeom>
+          <a:noFill/>
+        </p:spPr>
+        <p:txBody>
+          <a:bodyPr wrap="square">
+            <a:spAutoFit/>
+          </a:bodyPr>
+          <a:lstStyle/>
+          <a:p>
+            <a:pPr>
+              <a:spcAft>
+                <a:spcPts val="100"/>
+              </a:spcAft>
+            </a:pPr>
+            <a:r>
+              <a:rPr sz="3000" b="1">
+                <a:solidFill>
+                  <a:srgbClr val="008A72"/>
+                </a:solidFill>
+              </a:rPr>
+              <a:t>4.6×</a:t>
+            </a:r>
+          </a:p>
+          <a:p>
+            <a:pPr>
+              <a:spcBef>
+                <a:spcPts val="0"/>
+              </a:spcBef>
+            </a:pPr>
+            <a:r>
+              <a:rPr sz="1050">
+                <a:solidFill>
+                  <a:srgbClr val="6B7A8C"/>
+                </a:solidFill>
+              </a:rPr>
+              <a:t>two-wheelers per passenger vehicle</a:t>
+            </a:r>
+          </a:p>
+        </p:txBody>
+      </p:sp>
+      <p:sp>
+        <p:nvSpPr>
+          <p:cNvPr id="17413" name="TextBox 17412"/>
+          <p:cNvSpPr txBox="1"/>
+          <p:nvPr/>
+        </p:nvSpPr>
+        <p:spPr>
+          <a:xfrm>
+            <a:off x="4315968" y="2423160"/>
+            <a:ext cx="1828800" cy="960120"/>
+          </a:xfrm>
+          <a:prstGeom prst="rect">
+            <a:avLst/>
+          </a:prstGeom>
+          <a:noFill/>
+        </p:spPr>
+        <p:txBody>
+          <a:bodyPr wrap="square">
+            <a:spAutoFit/>
+          </a:bodyPr>
+          <a:lstStyle/>
+          <a:p>
+            <a:pPr>
+              <a:spcAft>
+                <a:spcPts val="100"/>
+              </a:spcAft>
+            </a:pPr>
+            <a:r>
+              <a:rPr sz="3000" b="1">
+                <a:solidFill>
+                  <a:srgbClr val="008A72"/>
+                </a:solidFill>
+              </a:rPr>
+              <a:t>₹0</a:t>
+            </a:r>
+          </a:p>
+          <a:p>
+            <a:pPr>
+              <a:spcBef>
+                <a:spcPts val="0"/>
+              </a:spcBef>
+            </a:pPr>
+            <a:r>
+              <a:rPr sz="1050">
+                <a:solidFill>
+                  <a:srgbClr val="6B7A8C"/>
+                </a:solidFill>
+              </a:rPr>
+              <a:t>marginal cost per additional user</a:t>
+            </a:r>
+          </a:p>
+        </p:txBody>
+      </p:sp>
+      <p:sp>
+        <p:nvSpPr>
+          <p:cNvPr id="17414" name="TextBox 17413"/>
+          <p:cNvSpPr txBox="1"/>
+          <p:nvPr/>
+        </p:nvSpPr>
+        <p:spPr>
+          <a:xfrm>
+            <a:off x="566928" y="3520440"/>
+            <a:ext cx="5577840" cy="365760"/>
+          </a:xfrm>
+          <a:prstGeom prst="rect">
+            <a:avLst/>
+          </a:prstGeom>
+          <a:noFill/>
+        </p:spPr>
+        <p:txBody>
+          <a:bodyPr wrap="square">
+            <a:spAutoFit/>
+          </a:bodyPr>
+          <a:lstStyle/>
+          <a:p>
+            <a:pPr>
+              <a:spcBef>
+                <a:spcPts val="0"/>
+              </a:spcBef>
+              <a:spcAft>
+                <a:spcPts val="400"/>
+              </a:spcAft>
+            </a:pPr>
+            <a:r>
+              <a:rPr sz="950" b="0" i="1">
+                <a:solidFill>
+                  <a:srgbClr val="6B7A8C"/>
+                </a:solidFill>
+              </a:rPr>
+              <a:t>Sales figures: SIAM, 15 April 2025.</a:t>
+            </a:r>
+          </a:p>
+        </p:txBody>
+      </p:sp>
+      <p:sp>
+        <p:nvSpPr>
+          <p:cNvPr id="17415" name="TextBox 17414"/>
+          <p:cNvSpPr txBox="1"/>
+          <p:nvPr/>
+        </p:nvSpPr>
+        <p:spPr>
+          <a:xfrm>
+            <a:off x="566928" y="3886200"/>
+            <a:ext cx="5577840" cy="2103120"/>
+          </a:xfrm>
+          <a:prstGeom prst="rect">
+            <a:avLst/>
+          </a:prstGeom>
+          <a:noFill/>
+        </p:spPr>
+        <p:txBody>
+          <a:bodyPr wrap="square">
+            <a:spAutoFit/>
+          </a:bodyPr>
+          <a:lstStyle/>
+          <a:p>
+            <a:pPr>
+              <a:spcBef>
+                <a:spcPts val="0"/>
+              </a:spcBef>
+              <a:spcAft>
+                <a:spcPts val="400"/>
+              </a:spcAft>
+            </a:pPr>
+            <a:r>
+              <a:rPr sz="1400" b="1" i="0">
+                <a:solidFill>
+                  <a:srgbClr val="0B1220"/>
+                </a:solidFill>
+              </a:rPr>
+              <a:t>Where it matters most</a:t>
+            </a:r>
+          </a:p>
+          <a:p>
+            <a:pPr>
+              <a:spcBef>
+                <a:spcPts val="0"/>
+              </a:spcBef>
+              <a:spcAft>
+                <a:spcPts val="400"/>
+              </a:spcAft>
+            </a:pPr>
+            <a:r>
+              <a:rPr sz="1150" b="1">
+                <a:solidFill>
+                  <a:srgbClr val="008A72"/>
+                </a:solidFill>
+              </a:rPr>
+              <a:t>›  </a:t>
+            </a:r>
+            <a:r>
+              <a:rPr sz="1150" b="0" i="0">
+                <a:solidFill>
+                  <a:srgbClr val="2B3645"/>
+                </a:solidFill>
+              </a:rPr>
+              <a:t>Everyday navigation — the turn you miss because the dot froze</a:t>
+            </a:r>
+          </a:p>
+          <a:p>
+            <a:pPr>
+              <a:spcBef>
+                <a:spcPts val="0"/>
+              </a:spcBef>
+              <a:spcAft>
+                <a:spcPts val="400"/>
+              </a:spcAft>
+            </a:pPr>
+            <a:r>
+              <a:rPr sz="1150" b="1">
+                <a:solidFill>
+                  <a:srgbClr val="008A72"/>
+                </a:solidFill>
+              </a:rPr>
+              <a:t>›  </a:t>
+            </a:r>
+            <a:r>
+              <a:rPr sz="1150" b="0" i="0">
+                <a:solidFill>
+                  <a:srgbClr val="2B3645"/>
+                </a:solidFill>
+              </a:rPr>
+              <a:t>Emergency response — an ambulance in an underpass, when dispatch needs it most</a:t>
+            </a:r>
+          </a:p>
+          <a:p>
+            <a:pPr>
+              <a:spcBef>
+                <a:spcPts val="0"/>
+              </a:spcBef>
+              <a:spcAft>
+                <a:spcPts val="400"/>
+              </a:spcAft>
+            </a:pPr>
+            <a:r>
+              <a:rPr sz="1150" b="1">
+                <a:solidFill>
+                  <a:srgbClr val="008A72"/>
+                </a:solidFill>
+              </a:rPr>
+              <a:t>›  </a:t>
+            </a:r>
+            <a:r>
+              <a:rPr sz="1150" b="0" i="0">
+                <a:solidFill>
+                  <a:srgbClr val="2B3645"/>
+                </a:solidFill>
+              </a:rPr>
+              <a:t>Logistics &amp; quick commerce — continuity through tunnels and multi-level warehouses</a:t>
+            </a:r>
+          </a:p>
+          <a:p>
+            <a:pPr>
+              <a:spcBef>
+                <a:spcPts val="0"/>
+              </a:spcBef>
+              <a:spcAft>
+                <a:spcPts val="400"/>
+              </a:spcAft>
+            </a:pPr>
+            <a:r>
+              <a:rPr sz="1150" b="1">
+                <a:solidFill>
+                  <a:srgbClr val="008A72"/>
+                </a:solidFill>
+              </a:rPr>
+              <a:t>›  </a:t>
+            </a:r>
+            <a:r>
+              <a:rPr sz="1150" b="0" i="0">
+                <a:solidFill>
+                  <a:srgbClr val="2B3645"/>
+                </a:solidFill>
+              </a:rPr>
+              <a:t>Sovereignty — GNSS can be jammed; an inertial + map solution cannot be</a:t>
+            </a:r>
+          </a:p>
+        </p:txBody>
+      </p:sp>
+      <p:sp>
+        <p:nvSpPr>
+          <p:cNvPr id="17416" name="TextBox 17415"/>
+          <p:cNvSpPr txBox="1"/>
+          <p:nvPr/>
+        </p:nvSpPr>
+        <p:spPr>
+          <a:xfrm>
+            <a:off x="6446520" y="1051560"/>
+            <a:ext cx="5349240" cy="4937760"/>
+          </a:xfrm>
+          <a:prstGeom prst="rect">
+            <a:avLst/>
+          </a:prstGeom>
+          <a:noFill/>
+        </p:spPr>
+        <p:txBody>
+          <a:bodyPr wrap="square">
+            <a:spAutoFit/>
+          </a:bodyPr>
+          <a:lstStyle/>
+          <a:p>
+            <a:pPr>
+              <a:spcBef>
+                <a:spcPts val="0"/>
+              </a:spcBef>
+              <a:spcAft>
+                <a:spcPts val="400"/>
+              </a:spcAft>
+            </a:pPr>
+            <a:r>
+              <a:rPr sz="1400" b="1" i="0">
+                <a:solidFill>
+                  <a:srgbClr val="0B1220"/>
+                </a:solidFill>
+              </a:rPr>
+              <a:t>Benefits</a:t>
+            </a:r>
+          </a:p>
+          <a:p>
+            <a:pPr>
+              <a:spcBef>
+                <a:spcPts val="900"/>
+              </a:spcBef>
+              <a:spcAft>
+                <a:spcPts val="200"/>
+              </a:spcAft>
+            </a:pPr>
+            <a:r>
+              <a:rPr sz="1200" b="1">
+                <a:solidFill>
+                  <a:srgbClr val="008A72"/>
+                </a:solidFill>
+              </a:rPr>
+              <a:t>Social</a:t>
+            </a:r>
+          </a:p>
+          <a:p>
+            <a:pPr>
+              <a:spcAft>
+                <a:spcPts val="0"/>
+              </a:spcAft>
+            </a:pPr>
+            <a:r>
+              <a:rPr sz="1100">
+                <a:solidFill>
+                  <a:srgbClr val="2B3645"/>
+                </a:solidFill>
+              </a:rPr>
+              <a:t>Navigation continuity is a safety function. It should not require a data plan, a subscription, or a car expensive enough to have inertial navigation fitted at the factory.</a:t>
+            </a:r>
+          </a:p>
+          <a:p>
+            <a:pPr>
+              <a:spcBef>
+                <a:spcPts val="900"/>
+              </a:spcBef>
+              <a:spcAft>
+                <a:spcPts val="200"/>
+              </a:spcAft>
+            </a:pPr>
+            <a:r>
+              <a:rPr sz="1200" b="1">
+                <a:solidFill>
+                  <a:srgbClr val="008A72"/>
+                </a:solidFill>
+              </a:rPr>
+              <a:t>Economic</a:t>
+            </a:r>
+          </a:p>
+          <a:p>
+            <a:pPr>
+              <a:spcAft>
+                <a:spcPts val="0"/>
+              </a:spcAft>
+            </a:pPr>
+            <a:r>
+              <a:rPr sz="1100">
+                <a:solidFill>
+                  <a:srgbClr val="2B3645"/>
+                </a:solidFill>
+              </a:rPr>
+              <a:t>Zero marginal cost per user. No map licensing, no cloud bill, no per-query fee — so the consumer app can stay free while the core is licensed to OEMs and fleet operators.</a:t>
+            </a:r>
+          </a:p>
+          <a:p>
+            <a:pPr>
+              <a:spcBef>
+                <a:spcPts val="900"/>
+              </a:spcBef>
+              <a:spcAft>
+                <a:spcPts val="200"/>
+              </a:spcAft>
+            </a:pPr>
+            <a:r>
+              <a:rPr sz="1200" b="1">
+                <a:solidFill>
+                  <a:srgbClr val="008A72"/>
+                </a:solidFill>
+              </a:rPr>
+              <a:t>Environmental</a:t>
+            </a:r>
+          </a:p>
+          <a:p>
+            <a:pPr>
+              <a:spcAft>
+                <a:spcPts val="0"/>
+              </a:spcAft>
+            </a:pPr>
+            <a:r>
+              <a:rPr sz="1100">
+                <a:solidFill>
+                  <a:srgbClr val="2B3645"/>
+                </a:solidFill>
+              </a:rPr>
+              <a:t>Zero additional hardware manufactured, and therefore zero additional e-waste. It runs on phones people already own, and on old ones — the model is 392 KB.</a:t>
+            </a:r>
+          </a:p>
+          <a:p>
+            <a:pPr>
+              <a:spcBef>
+                <a:spcPts val="900"/>
+              </a:spcBef>
+              <a:spcAft>
+                <a:spcPts val="200"/>
+              </a:spcAft>
+            </a:pPr>
+            <a:r>
+              <a:rPr sz="1200" b="1">
+                <a:solidFill>
+                  <a:srgbClr val="008A72"/>
+                </a:solidFill>
+              </a:rPr>
+              <a:t>Strategic</a:t>
+            </a:r>
+          </a:p>
+          <a:p>
+            <a:pPr>
+              <a:spcAft>
+                <a:spcPts val="0"/>
+              </a:spcAft>
+            </a:pPr>
+            <a:r>
+              <a:rPr sz="1100">
+                <a:solidFill>
+                  <a:srgbClr val="2B3645"/>
+                </a:solidFill>
+              </a:rPr>
+              <a:t>Positioning that depends on no satellite signal keeps working while a constellation is being rebuilt or deliberately denied. It complements NavIC rather than competing with it.</a:t>
+            </a:r>
+          </a:p>
+        </p:txBody>
+      </p:sp>
     </p:spTree>
     <p:extLst>
       <p:ext uri="{BB962C8B-B14F-4D97-AF65-F5344CB8AC3E}">
@@ -7736,141 +9044,14 @@
           <a:bodyPr/>
           <a:lstStyle/>
           <a:p>
-            <a:r>
-              <a:rPr sz="2500" b="1"/>
-              <a:t>RESEARCH AND REFERENCES</a:t>
-            </a:r>
-          </a:p>
-        </p:txBody>
-      </p:sp>
-      <p:sp>
-        <p:nvSpPr>
-          <p:cNvPr id="17410" name="TextBox 8"/>
-          <p:cNvSpPr txBox="1">
-            <a:spLocks noChangeArrowheads="1"/>
-          </p:cNvSpPr>
-          <p:nvPr/>
-        </p:nvSpPr>
-        <p:spPr bwMode="auto">
-          <a:xfrm>
-            <a:off x="548640" y="1371600"/>
-            <a:ext cx="11064240" cy="4480560"/>
-          </a:xfrm>
-          <a:prstGeom prst="rect">
-            <a:avLst/>
-          </a:prstGeom>
-          <a:noFill/>
-          <a:ln w="9525">
-            <a:noFill/>
-            <a:miter lim="800000"/>
-            <a:headEnd/>
-            <a:tailEnd/>
-          </a:ln>
-        </p:spPr>
-        <p:txBody>
-          <a:bodyPr wrap="square">
-            <a:spAutoFit/>
-          </a:bodyPr>
-          <a:lstStyle/>
-          <a:p>
-            <a:pPr marL="342900" marR="0" indent="-342900" algn="just" defTabSz="457200" rtl="0" eaLnBrk="1" fontAlgn="base" latinLnBrk="0" hangingPunct="1">
-              <a:lnSpc>
-                <a:spcPct val="100000"/>
-              </a:lnSpc>
-              <a:spcBef>
-                <a:spcPct val="0"/>
-              </a:spcBef>
-              <a:spcAft>
-                <a:spcPts val="400"/>
-              </a:spcAft>
-              <a:buClrTx/>
-              <a:buSzTx/>
-              <a:buFont typeface="Arial" panose="020B0604020202020204" pitchFamily="34" charset="0"/>
-              <a:buChar char="•"/>
-              <a:tabLst/>
-              <a:defRPr/>
-            </a:pPr>
-            <a:r>
-              <a:rPr sz="1400" b="1">
-                <a:solidFill>
-                  <a:srgbClr val="0B1F2A"/>
-                </a:solidFill>
-              </a:rPr>
-              <a:t>• Dataset: IO-VNBD — Inertial &amp; Odometry Vehicle Navigation Benchmark (smartphone IMU + vehicle CAN ground truth).</a:t>
-            </a:r>
-            <a:endParaRPr kumimoji="0" lang="en-US" sz="2800" b="0" i="0" u="none" strike="noStrike" kern="1200" cap="none" spc="0" normalizeH="0" baseline="0" noProof="0" dirty="0">
-              <a:ln>
-                <a:noFill/>
-              </a:ln>
-              <a:solidFill>
-                <a:prstClr val="black"/>
-              </a:solidFill>
-              <a:effectLst/>
-              <a:uLnTx/>
-              <a:uFillTx/>
-              <a:latin typeface="Arial" pitchFamily="34" charset="0"/>
-              <a:ea typeface="ＭＳ Ｐゴシック" pitchFamily="1" charset="-128"/>
-              <a:cs typeface="Arial" pitchFamily="34" charset="0"/>
-            </a:endParaRPr>
-          </a:p>
-          <a:p>
-            <a:pPr>
-              <a:spcAft>
-                <a:spcPts val="400"/>
-              </a:spcAft>
-            </a:pPr>
-            <a:r>
-              <a:rPr sz="1400" b="1">
-                <a:solidFill>
-                  <a:srgbClr val="0B1F2A"/>
-                </a:solidFill>
-              </a:rPr>
-              <a:t>• Map matching: Newson &amp; Krumm, 'Hidden Markov Map Matching Through Noise and Sparseness', ACM SIGSPATIAL 2009.</a:t>
-            </a:r>
-          </a:p>
-          <a:p>
-            <a:pPr>
-              <a:spcAft>
-                <a:spcPts val="400"/>
-              </a:spcAft>
-            </a:pPr>
-            <a:r>
-              <a:rPr sz="1400" b="1">
-                <a:solidFill>
-                  <a:srgbClr val="0B1F2A"/>
-                </a:solidFill>
-              </a:rPr>
-              <a:t>• Learned inertial odometry: TLIO (CathIAS) · RoNIN · TinyOdom (NESL) · AI-IMU-DR (Brossard et al.).</a:t>
-            </a:r>
-          </a:p>
-          <a:p>
-            <a:pPr>
-              <a:spcAft>
-                <a:spcPts val="400"/>
-              </a:spcAft>
-            </a:pPr>
-            <a:r>
-              <a:rPr sz="1400" b="1">
-                <a:solidFill>
-                  <a:srgbClr val="0B1F2A"/>
-                </a:solidFill>
-              </a:rPr>
-              <a:t>• Tooling: OpenStreetMap · MapLibre Native · Microsoft ONNX Runtime.</a:t>
-            </a:r>
-          </a:p>
-          <a:p>
-            <a:pPr>
-              <a:spcAft>
-                <a:spcPts val="400"/>
-              </a:spcAft>
-            </a:pPr>
-            <a:r>
-              <a:rPr sz="1400" b="1">
-                <a:solidFill>
-                  <a:srgbClr val="0B1F2A"/>
-                </a:solidFill>
-              </a:rPr>
-              <a:t>• Our measured evidence (repo): lab/stress/results/{mapfilter, isro_benchmark, heading_ablation}/summary.md · core/cpp/apps (edge engine).</a:t>
+            <a:pPr eaLnBrk="1" hangingPunct="1"/>
+            <a:r>
+              <a:rPr lang="en-US" sz="3600" b="1" dirty="0">
+                <a:latin typeface="Times New Roman" panose="02020603050405020304" pitchFamily="18" charset="0"/>
+                <a:ea typeface="ＭＳ Ｐゴシック" pitchFamily="1" charset="-128"/>
+                <a:cs typeface="Times New Roman" panose="02020603050405020304" pitchFamily="18" charset="0"/>
+              </a:rPr>
+              <a:t>RESEARCH  AND REFERENCES</a:t>
             </a:r>
           </a:p>
         </p:txBody>
@@ -8068,13 +9249,19 @@
           </a:fontRef>
         </p:style>
         <p:txBody>
-          <a:bodyPr rtlCol="0" anchor="ctr"/>
+          <a:bodyPr rtlCol="0" anchor="ctr" wrap="square"/>
           <a:lstStyle/>
           <a:p>
-            <a:r>
-              <a:rPr sz="900"/>
-              <a:t>[Team Name]</a:t>
-            </a:r>
+            <a:pPr algn="ctr"/>
+            <a:r>
+              <a:rPr sz="1050" b="1">
+                <a:solidFill>
+                  <a:srgbClr val="FFFFFF"/>
+                </a:solidFill>
+              </a:rPr>
+              <a:t>TEAM NAME</a:t>
+            </a:r>
+            <a:endParaRPr lang="en-IN" dirty="0"/>
           </a:p>
         </p:txBody>
       </p:sp>
@@ -8108,863 +9295,491 @@
           </a:prstGeom>
         </p:spPr>
       </p:pic>
-    </p:spTree>
-    <p:extLst>
-      <p:ext uri="{BB962C8B-B14F-4D97-AF65-F5344CB8AC3E}">
-        <p14:creationId xmlns:p14="http://schemas.microsoft.com/office/powerpoint/2010/main" val="3916788613"/>
-      </p:ext>
-    </p:extLst>
-  </p:cSld>
-  <p:clrMapOvr>
-    <a:masterClrMapping/>
-  </p:clrMapOvr>
-</p:sld>
-</file>
-
-<file path=ppt/slides/slide7.xml><?xml version="1.0" encoding="utf-8"?>
-<p:sld xmlns:a="http://schemas.openxmlformats.org/drawingml/2006/main" xmlns:r="http://schemas.openxmlformats.org/officeDocument/2006/relationships" xmlns:p="http://schemas.openxmlformats.org/presentationml/2006/main">
-  <p:cSld>
-    <p:spTree>
-      <p:nvGrpSpPr>
-        <p:cNvPr id="1" name=""/>
-        <p:cNvGrpSpPr/>
-        <p:nvPr/>
-      </p:nvGrpSpPr>
-      <p:grpSpPr>
-        <a:xfrm>
-          <a:off x="0" y="0"/>
-          <a:ext cx="0" cy="0"/>
-          <a:chOff x="0" y="0"/>
-          <a:chExt cx="0" cy="0"/>
-        </a:xfrm>
-      </p:grpSpPr>
-      <p:sp>
-        <p:nvSpPr>
-          <p:cNvPr id="10" name="Rectangle 9">
-            <a:extLst>
-              <a:ext uri="{FF2B5EF4-FFF2-40B4-BE49-F238E27FC236}">
-                <a16:creationId xmlns:a16="http://schemas.microsoft.com/office/drawing/2014/main" id="{AD4F69D3-EEB0-4C4C-9434-B9960FB5854C}"/>
-              </a:ext>
-            </a:extLst>
-          </p:cNvPr>
-          <p:cNvSpPr>
-            <a:spLocks noChangeArrowheads="1"/>
-          </p:cNvSpPr>
+      <p:sp>
+        <p:nvSpPr>
+          <p:cNvPr id="17410" name="TextBox 17409"/>
+          <p:cNvSpPr txBox="1"/>
           <p:nvPr/>
-        </p:nvSpPr>
-        <p:spPr bwMode="auto">
-          <a:xfrm>
-            <a:off x="0" y="6354762"/>
-            <a:ext cx="12191999" cy="503238"/>
-          </a:xfrm>
-          <a:prstGeom prst="rect">
-            <a:avLst/>
-          </a:prstGeom>
-          <a:solidFill>
-            <a:srgbClr val="0070C0"/>
-          </a:solidFill>
-          <a:ln w="9525">
-            <a:noFill/>
-            <a:miter lim="800000"/>
-            <a:headEnd/>
-            <a:tailEnd/>
-          </a:ln>
-          <a:effectLst>
-            <a:outerShdw dist="23000" dir="5400000" rotWithShape="0">
-              <a:srgbClr val="808080">
-                <a:alpha val="34999"/>
-              </a:srgbClr>
-            </a:outerShdw>
-          </a:effectLst>
-        </p:spPr>
-        <p:txBody>
-          <a:bodyPr anchor="ctr"/>
-          <a:lstStyle/>
-          <a:p>
-            <a:pPr marL="0" marR="0" lvl="0" indent="0" algn="ctr" defTabSz="457200" rtl="0" eaLnBrk="1" fontAlgn="auto" latinLnBrk="0" hangingPunct="1">
-              <a:lnSpc>
-                <a:spcPct val="100000"/>
-              </a:lnSpc>
-              <a:spcBef>
-                <a:spcPts val="0"/>
-              </a:spcBef>
-              <a:spcAft>
-                <a:spcPts val="0"/>
-              </a:spcAft>
-              <a:buClrTx/>
-              <a:buSzTx/>
-              <a:buFontTx/>
-              <a:buNone/>
-              <a:tabLst/>
-              <a:defRPr/>
-            </a:pPr>
-            <a:endParaRPr kumimoji="0" lang="en-US" sz="1800" b="0" i="0" u="none" strike="noStrike" kern="1200" cap="none" spc="0" normalizeH="0" baseline="0" noProof="0" dirty="0">
-              <a:ln>
-                <a:noFill/>
-              </a:ln>
-              <a:solidFill>
-                <a:srgbClr val="C0504D">
-                  <a:lumMod val="75000"/>
-                </a:srgbClr>
-              </a:solidFill>
-              <a:effectLst/>
-              <a:uLnTx/>
-              <a:uFillTx/>
-              <a:latin typeface="Calibri"/>
-              <a:ea typeface="ＭＳ Ｐゴシック" pitchFamily="1" charset="-128"/>
-              <a:cs typeface="+mn-cs"/>
-            </a:endParaRPr>
-          </a:p>
-        </p:txBody>
-      </p:sp>
-      <p:sp>
-        <p:nvSpPr>
-          <p:cNvPr id="6" name="Slide Number Placeholder 5"/>
-          <p:cNvSpPr>
-            <a:spLocks noGrp="1"/>
-          </p:cNvSpPr>
-          <p:nvPr>
-            <p:ph type="sldNum" sz="quarter" idx="12"/>
-          </p:nvPr>
-        </p:nvSpPr>
-        <p:spPr/>
-        <p:txBody>
-          <a:bodyPr/>
-          <a:lstStyle/>
-          <a:p>
-            <a:pPr marL="0" marR="0" lvl="0" indent="0" algn="r" defTabSz="457200" rtl="0" eaLnBrk="1" fontAlgn="base" latinLnBrk="0" hangingPunct="1">
-              <a:lnSpc>
-                <a:spcPct val="100000"/>
-              </a:lnSpc>
-              <a:spcBef>
-                <a:spcPct val="0"/>
-              </a:spcBef>
-              <a:spcAft>
-                <a:spcPct val="0"/>
-              </a:spcAft>
-              <a:buClrTx/>
-              <a:buSzTx/>
-              <a:buFontTx/>
-              <a:buNone/>
-              <a:tabLst/>
-              <a:defRPr/>
-            </a:pPr>
-            <a:fld id="{677C3CE7-23F7-4828-823C-E0205DF2CF97}" type="slidenum">
-              <a:rPr kumimoji="0" lang="en-US" sz="1200" b="1" i="0" u="none" strike="noStrike" kern="1200" cap="none" spc="0" normalizeH="0" baseline="0" noProof="0">
-                <a:ln>
-                  <a:noFill/>
-                </a:ln>
-                <a:solidFill>
-                  <a:prstClr val="white"/>
-                </a:solidFill>
-                <a:effectLst/>
-                <a:uLnTx/>
-                <a:uFillTx/>
-                <a:latin typeface="TradeGothic" pitchFamily="1" charset="0"/>
-                <a:ea typeface="ＭＳ Ｐゴシック" pitchFamily="1" charset="-128"/>
-                <a:cs typeface="+mn-cs"/>
-              </a:rPr>
-              <a:pPr marL="0" marR="0" lvl="0" indent="0" algn="r" defTabSz="457200" rtl="0" eaLnBrk="1" fontAlgn="base" latinLnBrk="0" hangingPunct="1">
-                <a:lnSpc>
-                  <a:spcPct val="100000"/>
-                </a:lnSpc>
-                <a:spcBef>
-                  <a:spcPct val="0"/>
-                </a:spcBef>
-                <a:spcAft>
-                  <a:spcPct val="0"/>
-                </a:spcAft>
-                <a:buClrTx/>
-                <a:buSzTx/>
-                <a:buFontTx/>
-                <a:buNone/>
-                <a:tabLst/>
-                <a:defRPr/>
-              </a:pPr>
-              <a:t>7</a:t>
-            </a:fld>
-            <a:endParaRPr kumimoji="0" lang="en-US" sz="1200" b="1" i="0" u="none" strike="noStrike" kern="1200" cap="none" spc="0" normalizeH="0" baseline="0" noProof="0" dirty="0">
-              <a:ln>
-                <a:noFill/>
-              </a:ln>
-              <a:solidFill>
-                <a:prstClr val="white"/>
-              </a:solidFill>
-              <a:effectLst/>
-              <a:uLnTx/>
-              <a:uFillTx/>
-              <a:latin typeface="TradeGothic" pitchFamily="1" charset="0"/>
-              <a:ea typeface="ＭＳ Ｐゴシック" pitchFamily="1" charset="-128"/>
-              <a:cs typeface="+mn-cs"/>
-            </a:endParaRPr>
-          </a:p>
-        </p:txBody>
-      </p:sp>
-      <p:sp>
-        <p:nvSpPr>
-          <p:cNvPr id="7" name="Footer Placeholder 6"/>
-          <p:cNvSpPr>
-            <a:spLocks noGrp="1"/>
-          </p:cNvSpPr>
-          <p:nvPr>
-            <p:ph type="ftr" sz="quarter" idx="11"/>
-          </p:nvPr>
         </p:nvSpPr>
         <p:spPr>
           <a:xfrm>
-            <a:off x="4648200" y="6356353"/>
-            <a:ext cx="3204000" cy="365125"/>
-          </a:xfrm>
-        </p:spPr>
-        <p:txBody>
-          <a:bodyPr/>
-          <a:lstStyle/>
-          <a:p>
-            <a:pPr marL="0" marR="0" lvl="0" indent="0" algn="ctr" defTabSz="457200" rtl="0" eaLnBrk="1" fontAlgn="auto" latinLnBrk="0" hangingPunct="1">
-              <a:lnSpc>
-                <a:spcPct val="100000"/>
-              </a:lnSpc>
-              <a:spcBef>
-                <a:spcPts val="0"/>
-              </a:spcBef>
-              <a:spcAft>
-                <a:spcPts val="0"/>
-              </a:spcAft>
-              <a:buClrTx/>
-              <a:buSzTx/>
-              <a:buFontTx/>
-              <a:buNone/>
-              <a:tabLst/>
-              <a:defRPr/>
-            </a:pPr>
-            <a:r>
-              <a:rPr kumimoji="0" lang="en-US" sz="1200" b="0" i="0" u="none" strike="noStrike" kern="1200" cap="none" spc="0" normalizeH="0" baseline="0" noProof="0">
-                <a:ln>
-                  <a:noFill/>
-                </a:ln>
-                <a:solidFill>
-                  <a:prstClr val="white"/>
-                </a:solidFill>
-                <a:effectLst/>
-                <a:uLnTx/>
-                <a:uFillTx/>
-                <a:latin typeface="TradeGothic"/>
-                <a:ea typeface="+mn-ea"/>
-                <a:cs typeface="+mn-cs"/>
-              </a:rPr>
-              <a:t>@SIH Idea submission- Template</a:t>
-            </a:r>
-            <a:endParaRPr kumimoji="0" lang="en-US" sz="1200" b="0" i="0" u="none" strike="noStrike" kern="1200" cap="none" spc="0" normalizeH="0" baseline="0" noProof="0" dirty="0">
-              <a:ln>
-                <a:noFill/>
-              </a:ln>
-              <a:solidFill>
-                <a:prstClr val="white"/>
-              </a:solidFill>
-              <a:effectLst/>
-              <a:uLnTx/>
-              <a:uFillTx/>
-              <a:latin typeface="TradeGothic"/>
-              <a:ea typeface="+mn-ea"/>
-              <a:cs typeface="+mn-cs"/>
-            </a:endParaRPr>
-          </a:p>
-        </p:txBody>
-      </p:sp>
-      <p:sp>
-        <p:nvSpPr>
-          <p:cNvPr id="3" name="Round Diagonal Corner Rectangle 2"/>
-          <p:cNvSpPr/>
-          <p:nvPr/>
-        </p:nvSpPr>
-        <p:spPr>
-          <a:xfrm>
-            <a:off x="0" y="1791032"/>
-            <a:ext cx="12192000" cy="4319200"/>
-          </a:xfrm>
-          <a:prstGeom prst="round2DiagRect">
-            <a:avLst/>
-          </a:prstGeom>
-          <a:solidFill>
-            <a:schemeClr val="accent1">
-              <a:lumMod val="20000"/>
-              <a:lumOff val="80000"/>
-            </a:schemeClr>
-          </a:solidFill>
-          <a:ln w="38100"/>
-        </p:spPr>
-        <p:style>
-          <a:lnRef idx="1">
-            <a:schemeClr val="accent1"/>
-          </a:lnRef>
-          <a:fillRef idx="3">
-            <a:schemeClr val="accent1"/>
-          </a:fillRef>
-          <a:effectRef idx="2">
-            <a:schemeClr val="accent1"/>
-          </a:effectRef>
-          <a:fontRef idx="minor">
-            <a:schemeClr val="lt1"/>
-          </a:fontRef>
-        </p:style>
-        <p:txBody>
-          <a:bodyPr rtlCol="0" anchor="ctr"/>
-          <a:lstStyle/>
-          <a:p>
-            <a:pPr algn="ctr"/>
-            <a:endParaRPr lang="en-IN"/>
-          </a:p>
-        </p:txBody>
-      </p:sp>
-      <p:sp>
-        <p:nvSpPr>
-          <p:cNvPr id="12" name="Google Shape;100;p3"/>
-          <p:cNvSpPr txBox="1"/>
-          <p:nvPr/>
-        </p:nvSpPr>
-        <p:spPr>
-          <a:xfrm>
-            <a:off x="367832" y="1915454"/>
-            <a:ext cx="11764736" cy="4070356"/>
+            <a:off x="566928" y="1051560"/>
+            <a:ext cx="5577840" cy="2377440"/>
           </a:xfrm>
           <a:prstGeom prst="rect">
             <a:avLst/>
           </a:prstGeom>
           <a:noFill/>
-          <a:ln>
-            <a:noFill/>
-          </a:ln>
         </p:spPr>
         <p:txBody>
-          <a:bodyPr spcFirstLastPara="1" wrap="square" lIns="91425" tIns="45700" rIns="91425" bIns="45700" anchor="t" anchorCtr="0">
-            <a:noAutofit/>
+          <a:bodyPr wrap="square">
+            <a:spAutoFit/>
           </a:bodyPr>
           <a:lstStyle/>
           <a:p>
-            <a:pPr marL="514350" marR="0" lvl="0" indent="-514350" algn="just" rtl="0">
-              <a:lnSpc>
-                <a:spcPct val="90000"/>
-              </a:lnSpc>
+            <a:pPr>
               <a:spcBef>
                 <a:spcPts val="0"/>
               </a:spcBef>
               <a:spcAft>
+                <a:spcPts val="400"/>
+              </a:spcAft>
+            </a:pPr>
+            <a:r>
+              <a:rPr sz="1350" b="1" i="0">
+                <a:solidFill>
+                  <a:srgbClr val="0B1220"/>
+                </a:solidFill>
+              </a:rPr>
+              <a:t>Dataset</a:t>
+            </a:r>
+          </a:p>
+          <a:p>
+            <a:pPr>
+              <a:spcBef>
                 <a:spcPts val="0"/>
-              </a:spcAft>
-              <a:buClr>
-                <a:schemeClr val="dk1"/>
-              </a:buClr>
-              <a:buSzPct val="100000"/>
-              <a:buFont typeface="Calibri"/>
-              <a:buAutoNum type="arabicPeriod"/>
-            </a:pPr>
-            <a:r>
-              <a:rPr lang="en-US" b="1" i="0" u="none" strike="noStrike" cap="none" dirty="0">
-                <a:solidFill>
-                  <a:schemeClr val="dk1"/>
-                </a:solidFill>
-                <a:latin typeface="Arial" panose="020B0604020202020204" pitchFamily="34" charset="0"/>
-                <a:ea typeface="Calibri"/>
-                <a:cs typeface="Arial" panose="020B0604020202020204" pitchFamily="34" charset="0"/>
-                <a:sym typeface="Calibri"/>
-              </a:rPr>
-              <a:t>Kindly keep the maximum slides limit up to six </a:t>
-            </a:r>
-            <a:r>
-              <a:rPr lang="en-US" b="1" i="0" u="none" strike="noStrike" cap="none" dirty="0">
-                <a:solidFill>
-                  <a:srgbClr val="C00000"/>
-                </a:solidFill>
-                <a:latin typeface="Arial" panose="020B0604020202020204" pitchFamily="34" charset="0"/>
-                <a:ea typeface="Calibri"/>
-                <a:cs typeface="Arial" panose="020B0604020202020204" pitchFamily="34" charset="0"/>
-                <a:sym typeface="Calibri"/>
-              </a:rPr>
-              <a:t>(6). </a:t>
-            </a:r>
-            <a:r>
-              <a:rPr lang="en-US" b="1" i="0" u="none" strike="noStrike" cap="none" dirty="0">
-                <a:solidFill>
-                  <a:schemeClr val="dk1"/>
-                </a:solidFill>
-                <a:latin typeface="Arial" panose="020B0604020202020204" pitchFamily="34" charset="0"/>
-                <a:ea typeface="Calibri"/>
-                <a:cs typeface="Arial" panose="020B0604020202020204" pitchFamily="34" charset="0"/>
-                <a:sym typeface="Calibri"/>
-              </a:rPr>
-              <a:t>( Including the </a:t>
-            </a:r>
-            <a:r>
-              <a:rPr lang="en-US" b="1" i="0" u="none" strike="noStrike" cap="none">
-                <a:solidFill>
-                  <a:schemeClr val="dk1"/>
-                </a:solidFill>
-                <a:latin typeface="Arial" panose="020B0604020202020204" pitchFamily="34" charset="0"/>
-                <a:ea typeface="Calibri"/>
-                <a:cs typeface="Arial" panose="020B0604020202020204" pitchFamily="34" charset="0"/>
-                <a:sym typeface="Calibri"/>
-              </a:rPr>
-              <a:t>title slide) </a:t>
-            </a:r>
-            <a:endParaRPr b="1" dirty="0">
-              <a:latin typeface="Arial" panose="020B0604020202020204" pitchFamily="34" charset="0"/>
-              <a:cs typeface="Arial" panose="020B0604020202020204" pitchFamily="34" charset="0"/>
-            </a:endParaRPr>
-          </a:p>
-          <a:p>
-            <a:pPr marL="514350" marR="0" lvl="0" indent="-514350" algn="just" rtl="0">
-              <a:lnSpc>
-                <a:spcPct val="90000"/>
-              </a:lnSpc>
-              <a:spcBef>
-                <a:spcPts val="1000"/>
               </a:spcBef>
               <a:spcAft>
+                <a:spcPts val="1000"/>
+              </a:spcAft>
+            </a:pPr>
+            <a:r>
+              <a:rPr sz="1100" b="0" i="0">
+                <a:solidFill>
+                  <a:srgbClr val="2B3645"/>
+                </a:solidFill>
+              </a:rPr>
+              <a:t>IO-VNBD — Inertial and Odometry Benchmark Dataset for ground vehicle positioning. Onyekpe et al. github.com/onyekpeu/IO-VNBD</a:t>
+            </a:r>
+          </a:p>
+          <a:p>
+            <a:pPr>
+              <a:spcBef>
                 <a:spcPts val="0"/>
-              </a:spcAft>
-              <a:buClr>
-                <a:schemeClr val="dk1"/>
-              </a:buClr>
-              <a:buSzPct val="100000"/>
-              <a:buFont typeface="Calibri"/>
-              <a:buAutoNum type="arabicPeriod"/>
-            </a:pPr>
-            <a:r>
-              <a:rPr lang="en-US" b="1" i="0" u="none" strike="noStrike" cap="none" dirty="0">
-                <a:solidFill>
-                  <a:schemeClr val="dk1"/>
-                </a:solidFill>
-                <a:latin typeface="Arial" panose="020B0604020202020204" pitchFamily="34" charset="0"/>
-                <a:ea typeface="Calibri"/>
-                <a:cs typeface="Arial" panose="020B0604020202020204" pitchFamily="34" charset="0"/>
-                <a:sym typeface="Calibri"/>
-              </a:rPr>
-              <a:t>Try to avoid paragraphs and post your idea in points /diagrams / Infographics /pictures </a:t>
-            </a:r>
-            <a:endParaRPr b="1" dirty="0">
-              <a:latin typeface="Arial" panose="020B0604020202020204" pitchFamily="34" charset="0"/>
-              <a:cs typeface="Arial" panose="020B0604020202020204" pitchFamily="34" charset="0"/>
-            </a:endParaRPr>
-          </a:p>
-          <a:p>
-            <a:pPr marL="514350" marR="0" lvl="0" indent="-514350" algn="just" rtl="0">
-              <a:lnSpc>
-                <a:spcPct val="90000"/>
-              </a:lnSpc>
-              <a:spcBef>
-                <a:spcPts val="1000"/>
               </a:spcBef>
               <a:spcAft>
+                <a:spcPts val="1200"/>
+              </a:spcAft>
+            </a:pPr>
+            <a:r>
+              <a:rPr sz="1100" b="0" i="1">
+                <a:solidFill>
+                  <a:srgbClr val="6B7A8C"/>
+                </a:solidFill>
+              </a:rPr>
+              <a:t>All results below are leave-file-out on this corpus, labelled from the vehicle CAN bus at 10 Hz — never from phone GNSS.</a:t>
+            </a:r>
+          </a:p>
+          <a:p>
+            <a:pPr>
+              <a:spcBef>
                 <a:spcPts val="0"/>
-              </a:spcAft>
-              <a:buClr>
-                <a:schemeClr val="dk1"/>
-              </a:buClr>
-              <a:buSzPct val="100000"/>
-              <a:buFont typeface="Calibri"/>
-              <a:buAutoNum type="arabicPeriod"/>
-            </a:pPr>
-            <a:r>
-              <a:rPr lang="en-US" b="1" i="0" u="none" strike="noStrike" cap="none" dirty="0">
-                <a:solidFill>
-                  <a:schemeClr val="dk1"/>
-                </a:solidFill>
-                <a:latin typeface="Arial" panose="020B0604020202020204" pitchFamily="34" charset="0"/>
-                <a:ea typeface="Calibri"/>
-                <a:cs typeface="Arial" panose="020B0604020202020204" pitchFamily="34" charset="0"/>
-                <a:sym typeface="Calibri"/>
-              </a:rPr>
-              <a:t>Keep your explanation precise and easy to understand</a:t>
-            </a:r>
-            <a:endParaRPr b="1" dirty="0">
-              <a:latin typeface="Arial" panose="020B0604020202020204" pitchFamily="34" charset="0"/>
-              <a:cs typeface="Arial" panose="020B0604020202020204" pitchFamily="34" charset="0"/>
-            </a:endParaRPr>
-          </a:p>
-          <a:p>
-            <a:pPr marL="514350" marR="0" lvl="0" indent="-514350" algn="just" rtl="0">
-              <a:lnSpc>
-                <a:spcPct val="90000"/>
-              </a:lnSpc>
-              <a:spcBef>
-                <a:spcPts val="1000"/>
               </a:spcBef>
               <a:spcAft>
+                <a:spcPts val="400"/>
+              </a:spcAft>
+            </a:pPr>
+            <a:r>
+              <a:rPr sz="1350" b="1" i="0">
+                <a:solidFill>
+                  <a:srgbClr val="0B1220"/>
+                </a:solidFill>
+              </a:rPr>
+              <a:t>Foundational work we build on</a:t>
+            </a:r>
+          </a:p>
+          <a:p>
+            <a:pPr>
+              <a:spcBef>
                 <a:spcPts val="0"/>
-              </a:spcAft>
-              <a:buClr>
-                <a:schemeClr val="dk1"/>
-              </a:buClr>
-              <a:buSzPct val="100000"/>
-              <a:buFont typeface="Calibri"/>
-              <a:buAutoNum type="arabicPeriod"/>
-            </a:pPr>
-            <a:r>
-              <a:rPr lang="en-US" b="1" i="0" u="none" strike="noStrike" cap="none" dirty="0">
-                <a:solidFill>
-                  <a:schemeClr val="dk1"/>
-                </a:solidFill>
-                <a:latin typeface="Arial" panose="020B0604020202020204" pitchFamily="34" charset="0"/>
-                <a:ea typeface="Calibri"/>
-                <a:cs typeface="Arial" panose="020B0604020202020204" pitchFamily="34" charset="0"/>
-                <a:sym typeface="Calibri"/>
-              </a:rPr>
-              <a:t>Idea should be unique and novel. </a:t>
-            </a:r>
-            <a:endParaRPr b="1" dirty="0">
-              <a:latin typeface="Arial" panose="020B0604020202020204" pitchFamily="34" charset="0"/>
-              <a:cs typeface="Arial" panose="020B0604020202020204" pitchFamily="34" charset="0"/>
-            </a:endParaRPr>
-          </a:p>
-          <a:p>
-            <a:pPr marL="514350" marR="0" lvl="0" indent="-514350" algn="just" rtl="0">
-              <a:lnSpc>
-                <a:spcPct val="90000"/>
-              </a:lnSpc>
-              <a:spcBef>
-                <a:spcPts val="1000"/>
               </a:spcBef>
               <a:spcAft>
+                <a:spcPts val="400"/>
+              </a:spcAft>
+            </a:pPr>
+            <a:r>
+              <a:rPr sz="1050" b="1">
+                <a:solidFill>
+                  <a:srgbClr val="008A72"/>
+                </a:solidFill>
+              </a:rPr>
+              <a:t>·  </a:t>
+            </a:r>
+            <a:r>
+              <a:rPr sz="1050" b="0" i="0">
+                <a:solidFill>
+                  <a:srgbClr val="2B3645"/>
+                </a:solidFill>
+              </a:rPr>
+              <a:t>Newson &amp; Krumm (2009) — Hidden Markov map matching. Their algorithm; we implement and cite it, adapted for dead-reckoned rather than GNSS input.</a:t>
+            </a:r>
+          </a:p>
+          <a:p>
+            <a:pPr>
+              <a:spcBef>
                 <a:spcPts val="0"/>
-              </a:spcAft>
-              <a:buClr>
-                <a:schemeClr val="dk1"/>
-              </a:buClr>
-              <a:buSzPct val="100000"/>
-              <a:buFont typeface="Calibri"/>
-              <a:buAutoNum type="arabicPeriod"/>
-            </a:pPr>
-            <a:r>
-              <a:rPr lang="en-US" b="1" i="0" u="none" strike="noStrike" cap="none" dirty="0">
-                <a:solidFill>
-                  <a:schemeClr val="dk1"/>
-                </a:solidFill>
-                <a:latin typeface="Arial" panose="020B0604020202020204" pitchFamily="34" charset="0"/>
-                <a:ea typeface="Calibri"/>
-                <a:cs typeface="Arial" panose="020B0604020202020204" pitchFamily="34" charset="0"/>
-                <a:sym typeface="Calibri"/>
-              </a:rPr>
-              <a:t>You can only use provided </a:t>
-            </a:r>
-            <a:r>
-              <a:rPr lang="en-US" b="1" dirty="0">
-                <a:solidFill>
-                  <a:schemeClr val="dk1"/>
-                </a:solidFill>
-                <a:latin typeface="Arial" panose="020B0604020202020204" pitchFamily="34" charset="0"/>
-                <a:ea typeface="Calibri"/>
-                <a:cs typeface="Arial" panose="020B0604020202020204" pitchFamily="34" charset="0"/>
-                <a:sym typeface="Calibri"/>
-              </a:rPr>
-              <a:t>template</a:t>
-            </a:r>
-            <a:r>
-              <a:rPr lang="en-US" b="1" i="0" u="none" strike="noStrike" cap="none" dirty="0">
-                <a:solidFill>
-                  <a:schemeClr val="dk1"/>
-                </a:solidFill>
-                <a:latin typeface="Arial" panose="020B0604020202020204" pitchFamily="34" charset="0"/>
-                <a:ea typeface="Calibri"/>
-                <a:cs typeface="Arial" panose="020B0604020202020204" pitchFamily="34" charset="0"/>
-                <a:sym typeface="Calibri"/>
-              </a:rPr>
-              <a:t> for making the </a:t>
-            </a:r>
-            <a:r>
-              <a:rPr lang="en-US" b="1" dirty="0">
-                <a:solidFill>
-                  <a:schemeClr val="dk1"/>
-                </a:solidFill>
-                <a:latin typeface="Arial" panose="020B0604020202020204" pitchFamily="34" charset="0"/>
-                <a:ea typeface="Calibri"/>
-                <a:cs typeface="Arial" panose="020B0604020202020204" pitchFamily="34" charset="0"/>
-                <a:sym typeface="Calibri"/>
-              </a:rPr>
-              <a:t>PPT</a:t>
-            </a:r>
-            <a:r>
-              <a:rPr lang="en-US" b="1" i="0" u="none" strike="noStrike" cap="none" dirty="0">
-                <a:solidFill>
-                  <a:schemeClr val="dk1"/>
-                </a:solidFill>
-                <a:latin typeface="Arial" panose="020B0604020202020204" pitchFamily="34" charset="0"/>
-                <a:ea typeface="Calibri"/>
-                <a:cs typeface="Arial" panose="020B0604020202020204" pitchFamily="34" charset="0"/>
-                <a:sym typeface="Calibri"/>
-              </a:rPr>
-              <a:t> without changing the idea details pointers (mentioned in previous slides).</a:t>
-            </a:r>
-            <a:endParaRPr b="1" i="0" u="none" strike="noStrike" cap="none" dirty="0">
-              <a:solidFill>
-                <a:schemeClr val="dk1"/>
-              </a:solidFill>
-              <a:latin typeface="Arial" panose="020B0604020202020204" pitchFamily="34" charset="0"/>
-              <a:ea typeface="Calibri"/>
-              <a:cs typeface="Arial" panose="020B0604020202020204" pitchFamily="34" charset="0"/>
-              <a:sym typeface="Calibri"/>
-            </a:endParaRPr>
-          </a:p>
-          <a:p>
-            <a:pPr marL="514350" marR="0" lvl="0" indent="-514350" algn="just" rtl="0">
-              <a:lnSpc>
-                <a:spcPct val="90000"/>
-              </a:lnSpc>
-              <a:spcBef>
-                <a:spcPts val="1000"/>
               </a:spcBef>
               <a:spcAft>
+                <a:spcPts val="400"/>
+              </a:spcAft>
+            </a:pPr>
+            <a:r>
+              <a:rPr sz="1050" b="1">
+                <a:solidFill>
+                  <a:srgbClr val="008A72"/>
+                </a:solidFill>
+              </a:rPr>
+              <a:t>·  </a:t>
+            </a:r>
+            <a:r>
+              <a:rPr sz="1050" b="0" i="0">
+                <a:solidFill>
+                  <a:srgbClr val="2B3645"/>
+                </a:solidFill>
+              </a:rPr>
+              <a:t>Brossard et al. — AI-IMU dead reckoning (invariant EKF, vehicle DR).</a:t>
+            </a:r>
+          </a:p>
+          <a:p>
+            <a:pPr>
+              <a:spcBef>
                 <a:spcPts val="0"/>
-              </a:spcAft>
-              <a:buClr>
-                <a:schemeClr val="dk1"/>
-              </a:buClr>
-              <a:buSzPct val="100000"/>
-              <a:buFont typeface="Calibri"/>
-              <a:buAutoNum type="arabicPeriod"/>
-            </a:pPr>
-            <a:r>
-              <a:rPr lang="en-US" b="1" i="0" u="none" strike="noStrike" cap="none" dirty="0">
-                <a:solidFill>
-                  <a:schemeClr val="dk1"/>
-                </a:solidFill>
-                <a:latin typeface="Arial" panose="020B0604020202020204" pitchFamily="34" charset="0"/>
-                <a:ea typeface="Calibri"/>
-                <a:cs typeface="Arial" panose="020B0604020202020204" pitchFamily="34" charset="0"/>
-                <a:sym typeface="Calibri"/>
-              </a:rPr>
-              <a:t>You need to save the file in PDF and upload the same on portal. No PPT, Word Doc or any other format will be supported.</a:t>
-            </a:r>
-            <a:endParaRPr b="1" dirty="0">
-              <a:latin typeface="Arial" panose="020B0604020202020204" pitchFamily="34" charset="0"/>
-              <a:cs typeface="Arial" panose="020B0604020202020204" pitchFamily="34" charset="0"/>
-            </a:endParaRPr>
-          </a:p>
-          <a:p>
-            <a:pPr marL="514350" marR="0" lvl="0" indent="-349885" algn="just" rtl="0">
-              <a:lnSpc>
-                <a:spcPct val="90000"/>
-              </a:lnSpc>
-              <a:spcBef>
-                <a:spcPts val="1000"/>
               </a:spcBef>
               <a:spcAft>
+                <a:spcPts val="400"/>
+              </a:spcAft>
+            </a:pPr>
+            <a:r>
+              <a:rPr sz="1050" b="1">
+                <a:solidFill>
+                  <a:srgbClr val="008A72"/>
+                </a:solidFill>
+              </a:rPr>
+              <a:t>·  </a:t>
+            </a:r>
+            <a:r>
+              <a:rPr sz="1050" b="0" i="0">
+                <a:solidFill>
+                  <a:srgbClr val="2B3645"/>
+                </a:solidFill>
+              </a:rPr>
+              <a:t>Herath et al. RoNIN · Liu et al. TLIO · TinyOdom — the neural inertial odometry line COAST-VNet-1 belongs to.</a:t>
+            </a:r>
+          </a:p>
+          <a:p>
+            <a:pPr>
+              <a:spcBef>
                 <a:spcPts val="0"/>
-              </a:spcAft>
-              <a:buClr>
-                <a:schemeClr val="dk1"/>
-              </a:buClr>
-              <a:buSzPct val="100000"/>
-              <a:buFont typeface="Calibri"/>
-              <a:buNone/>
-            </a:pPr>
-            <a:endParaRPr b="1" i="0" u="none" strike="noStrike" cap="none" dirty="0">
-              <a:solidFill>
-                <a:schemeClr val="dk1"/>
-              </a:solidFill>
-              <a:latin typeface="Arial" panose="020B0604020202020204" pitchFamily="34" charset="0"/>
-              <a:ea typeface="Calibri"/>
-              <a:cs typeface="Arial" panose="020B0604020202020204" pitchFamily="34" charset="0"/>
-              <a:sym typeface="Calibri"/>
-            </a:endParaRPr>
-          </a:p>
-          <a:p>
-            <a:pPr marL="0" marR="0" lvl="0" indent="0" algn="just" rtl="0">
-              <a:lnSpc>
-                <a:spcPct val="90000"/>
-              </a:lnSpc>
-              <a:spcBef>
-                <a:spcPts val="1000"/>
               </a:spcBef>
               <a:spcAft>
+                <a:spcPts val="400"/>
+              </a:spcAft>
+            </a:pPr>
+            <a:r>
+              <a:rPr sz="1050" b="1">
+                <a:solidFill>
+                  <a:srgbClr val="008A72"/>
+                </a:solidFill>
+              </a:rPr>
+              <a:t>·  </a:t>
+            </a:r>
+            <a:r>
+              <a:rPr sz="1050" b="0" i="0">
+                <a:solidFill>
+                  <a:srgbClr val="2B3645"/>
+                </a:solidFill>
+              </a:rPr>
+              <a:t>EqNIO (ICLR 2025) — gravity-axis equivariance; our mount canonicalisation follows this idea.</a:t>
+            </a:r>
+          </a:p>
+        </p:txBody>
+      </p:sp>
+      <p:sp>
+        <p:nvSpPr>
+          <p:cNvPr id="17411" name="TextBox 17410"/>
+          <p:cNvSpPr txBox="1"/>
+          <p:nvPr/>
+        </p:nvSpPr>
+        <p:spPr>
+          <a:xfrm>
+            <a:off x="6446520" y="1051560"/>
+            <a:ext cx="5349240" cy="4846320"/>
+          </a:xfrm>
+          <a:prstGeom prst="rect">
+            <a:avLst/>
+          </a:prstGeom>
+          <a:noFill/>
+        </p:spPr>
+        <p:txBody>
+          <a:bodyPr wrap="square">
+            <a:spAutoFit/>
+          </a:bodyPr>
+          <a:lstStyle/>
+          <a:p>
+            <a:pPr>
+              <a:spcBef>
                 <a:spcPts val="0"/>
+              </a:spcBef>
+              <a:spcAft>
+                <a:spcPts val="400"/>
               </a:spcAft>
-              <a:buClr>
-                <a:schemeClr val="dk1"/>
-              </a:buClr>
-              <a:buSzPct val="100000"/>
-              <a:buFont typeface="Arial"/>
-              <a:buNone/>
-            </a:pPr>
-            <a:r>
-              <a:rPr lang="en-US" b="1" i="0" u="none" strike="noStrike" cap="none" dirty="0">
-                <a:solidFill>
-                  <a:srgbClr val="C00000"/>
-                </a:solidFill>
-                <a:latin typeface="Arial" panose="020B0604020202020204" pitchFamily="34" charset="0"/>
-                <a:ea typeface="Calibri"/>
-                <a:cs typeface="Arial" panose="020B0604020202020204" pitchFamily="34" charset="0"/>
-                <a:sym typeface="Calibri"/>
-              </a:rPr>
-              <a:t>Note - You can delete this slide (Important Pointers) when you upload the details of your idea on SIH portal.</a:t>
-            </a:r>
-            <a:endParaRPr b="1" dirty="0">
-              <a:solidFill>
-                <a:srgbClr val="C00000"/>
-              </a:solidFill>
-              <a:latin typeface="Arial" panose="020B0604020202020204" pitchFamily="34" charset="0"/>
-              <a:cs typeface="Arial" panose="020B0604020202020204" pitchFamily="34" charset="0"/>
-            </a:endParaRPr>
-          </a:p>
-          <a:p>
-            <a:pPr marL="914400" marR="0" lvl="1" indent="-316230" algn="just" rtl="0">
-              <a:lnSpc>
-                <a:spcPct val="90000"/>
-              </a:lnSpc>
+            </a:pPr>
+            <a:r>
+              <a:rPr sz="1350" b="1" i="0">
+                <a:solidFill>
+                  <a:srgbClr val="0B1220"/>
+                </a:solidFill>
+              </a:rPr>
+              <a:t>Our own measured results</a:t>
+            </a:r>
+          </a:p>
+          <a:p>
+            <a:pPr>
+              <a:spcBef>
+                <a:spcPts val="0"/>
+              </a:spcBef>
+              <a:spcAft>
+                <a:spcPts val="1000"/>
+              </a:spcAft>
+            </a:pPr>
+            <a:r>
+              <a:rPr sz="1050" b="0" i="1">
+                <a:solidFill>
+                  <a:srgbClr val="6B7A8C"/>
+                </a:solidFill>
+              </a:rPr>
+              <a:t>Every figure in this deck is re-derived from a committed results file by tools/verify_claims.py, which fails the build if a slide states a number no measurement produced.</a:t>
+            </a:r>
+          </a:p>
+          <a:p>
+            <a:pPr>
               <a:spcBef>
                 <a:spcPts val="500"/>
               </a:spcBef>
               <a:spcAft>
                 <a:spcPts val="0"/>
               </a:spcAft>
-              <a:buClr>
-                <a:schemeClr val="dk1"/>
-              </a:buClr>
-              <a:buSzPct val="100000"/>
-              <a:buFont typeface="Calibri"/>
-              <a:buNone/>
-            </a:pPr>
-            <a:endParaRPr sz="2000" b="1" i="0" u="none" strike="noStrike" cap="none" dirty="0">
-              <a:solidFill>
-                <a:schemeClr val="dk1"/>
-              </a:solidFill>
-              <a:latin typeface="Arial" panose="020B0604020202020204" pitchFamily="34" charset="0"/>
-              <a:ea typeface="Calibri"/>
-              <a:cs typeface="Arial" panose="020B0604020202020204" pitchFamily="34" charset="0"/>
-              <a:sym typeface="Calibri"/>
-            </a:endParaRPr>
-          </a:p>
-        </p:txBody>
-      </p:sp>
-      <p:sp>
-        <p:nvSpPr>
-          <p:cNvPr id="4" name="TextBox 3"/>
-          <p:cNvSpPr txBox="1"/>
-          <p:nvPr/>
-        </p:nvSpPr>
-        <p:spPr>
-          <a:xfrm>
-            <a:off x="1393371" y="107066"/>
-            <a:ext cx="8410540" cy="646331"/>
-          </a:xfrm>
-          <a:prstGeom prst="rect">
-            <a:avLst/>
-          </a:prstGeom>
-          <a:noFill/>
-        </p:spPr>
-        <p:txBody>
-          <a:bodyPr wrap="square" rtlCol="0">
-            <a:spAutoFit/>
-          </a:bodyPr>
-          <a:lstStyle/>
-          <a:p>
-            <a:pPr algn="ctr"/>
-            <a:r>
-              <a:rPr lang="en-US" sz="3600" b="1" dirty="0">
-                <a:latin typeface="Times New Roman" panose="02020603050405020304" pitchFamily="18" charset="0"/>
-                <a:cs typeface="Times New Roman" panose="02020603050405020304" pitchFamily="18" charset="0"/>
-              </a:rPr>
-              <a:t>IMPORTANT INSTRUCTIONS</a:t>
-            </a:r>
-            <a:endParaRPr lang="en-IN" sz="3600" b="1" dirty="0">
-              <a:latin typeface="Times New Roman" panose="02020603050405020304" pitchFamily="18" charset="0"/>
-              <a:cs typeface="Times New Roman" panose="02020603050405020304" pitchFamily="18" charset="0"/>
-            </a:endParaRPr>
-          </a:p>
-        </p:txBody>
-      </p:sp>
-      <p:sp>
-        <p:nvSpPr>
-          <p:cNvPr id="5" name="TextBox 4"/>
-          <p:cNvSpPr txBox="1"/>
-          <p:nvPr/>
-        </p:nvSpPr>
-        <p:spPr>
-          <a:xfrm>
-            <a:off x="602343" y="1181900"/>
-            <a:ext cx="9557657" cy="341632"/>
-          </a:xfrm>
-          <a:prstGeom prst="rect">
-            <a:avLst/>
-          </a:prstGeom>
-          <a:noFill/>
-        </p:spPr>
-        <p:txBody>
-          <a:bodyPr wrap="square" rtlCol="0">
-            <a:spAutoFit/>
-          </a:bodyPr>
-          <a:lstStyle/>
-          <a:p>
-            <a:pPr algn="just">
-              <a:lnSpc>
-                <a:spcPct val="90000"/>
-              </a:lnSpc>
+            </a:pPr>
+            <a:r>
+              <a:rPr sz="1050">
+                <a:solidFill>
+                  <a:srgbClr val="2B3645"/>
+                </a:solidFill>
+              </a:rPr>
+              <a:t>Map-in-loop vs dead reckoning   </a:t>
+            </a:r>
+            <a:r>
+              <a:rPr sz="1050" b="1">
+                <a:solidFill>
+                  <a:srgbClr val="008A72"/>
+                </a:solidFill>
+              </a:rPr>
+              <a:t>2.02× lower median error</a:t>
+            </a:r>
+          </a:p>
+          <a:p>
+            <a:pPr>
               <a:spcBef>
-                <a:spcPts val="1000"/>
+                <a:spcPts val="500"/>
               </a:spcBef>
               <a:spcAft>
                 <a:spcPts val="0"/>
               </a:spcAft>
-              <a:buClr>
-                <a:schemeClr val="dk1"/>
-              </a:buClr>
-              <a:buSzPct val="100000"/>
-            </a:pPr>
-            <a:r>
-              <a:rPr lang="en-US" b="1" dirty="0">
-                <a:solidFill>
-                  <a:schemeClr val="dk1"/>
-                </a:solidFill>
-                <a:latin typeface="Arial" panose="020B0604020202020204" pitchFamily="34" charset="0"/>
-                <a:ea typeface="Calibri"/>
-                <a:cs typeface="Arial" panose="020B0604020202020204" pitchFamily="34" charset="0"/>
-              </a:rPr>
-              <a:t>Please ensure below pointers are met while submitting the Idea PPT:</a:t>
-            </a:r>
-            <a:endParaRPr lang="en-IN" b="1" dirty="0">
-              <a:solidFill>
-                <a:schemeClr val="dk1"/>
-              </a:solidFill>
-              <a:latin typeface="Arial" panose="020B0604020202020204" pitchFamily="34" charset="0"/>
-              <a:ea typeface="Calibri"/>
-              <a:cs typeface="Arial" panose="020B0604020202020204" pitchFamily="34" charset="0"/>
-            </a:endParaRPr>
-          </a:p>
-        </p:txBody>
-      </p:sp>
-      <p:pic>
-        <p:nvPicPr>
-          <p:cNvPr id="13" name="Picture 12"/>
-          <p:cNvPicPr>
-            <a:picLocks noChangeAspect="1"/>
-          </p:cNvPicPr>
-          <p:nvPr/>
-        </p:nvPicPr>
-        <p:blipFill>
-          <a:blip r:embed="rId3">
-            <a:extLst>
-              <a:ext uri="{28A0092B-C50C-407E-A947-70E740481C1C}">
-                <a14:useLocalDpi xmlns:a14="http://schemas.microsoft.com/office/drawing/2010/main" val="0"/>
-              </a:ext>
-            </a:extLst>
-          </a:blip>
-          <a:stretch>
-            <a:fillRect/>
-          </a:stretch>
-        </p:blipFill>
-        <p:spPr>
-          <a:xfrm>
-            <a:off x="9780086" y="1500"/>
-            <a:ext cx="2249850" cy="1062337"/>
-          </a:xfrm>
-          <a:prstGeom prst="rect">
-            <a:avLst/>
-          </a:prstGeom>
-        </p:spPr>
-      </p:pic>
+            </a:pPr>
+            <a:r>
+              <a:rPr sz="1050">
+                <a:solidFill>
+                  <a:srgbClr val="2B3645"/>
+                </a:solidFill>
+              </a:rPr>
+              <a:t>Post-hoc road snapping (control)   </a:t>
+            </a:r>
+            <a:r>
+              <a:rPr sz="1050" b="1">
+                <a:solidFill>
+                  <a:srgbClr val="C2393D"/>
+                </a:solidFill>
+              </a:rPr>
+              <a:t>0.98× — worse than nothing</a:t>
+            </a:r>
+          </a:p>
+          <a:p>
+            <a:pPr>
+              <a:spcBef>
+                <a:spcPts val="500"/>
+              </a:spcBef>
+              <a:spcAft>
+                <a:spcPts val="0"/>
+              </a:spcAft>
+            </a:pPr>
+            <a:r>
+              <a:rPr sz="1050">
+                <a:solidFill>
+                  <a:srgbClr val="2B3645"/>
+                </a:solidFill>
+              </a:rPr>
+              <a:t>Perfect-gyro ablation   </a:t>
+            </a:r>
+            <a:r>
+              <a:rPr sz="1050" b="1">
+                <a:solidFill>
+                  <a:srgbClr val="C2393D"/>
+                </a:solidFill>
+              </a:rPr>
+              <a:t>still fails 55% of segments</a:t>
+            </a:r>
+          </a:p>
+          <a:p>
+            <a:pPr>
+              <a:spcBef>
+                <a:spcPts val="500"/>
+              </a:spcBef>
+              <a:spcAft>
+                <a:spcPts val="0"/>
+              </a:spcAft>
+            </a:pPr>
+            <a:r>
+              <a:rPr sz="1050">
+                <a:solidFill>
+                  <a:srgbClr val="2B3645"/>
+                </a:solidFill>
+              </a:rPr>
+              <a:t>Median drift, free DR → COAST   </a:t>
+            </a:r>
+            <a:r>
+              <a:rPr sz="1050" b="1">
+                <a:solidFill>
+                  <a:srgbClr val="008A72"/>
+                </a:solidFill>
+              </a:rPr>
+              <a:t>27.6% → 16.8%</a:t>
+            </a:r>
+          </a:p>
+          <a:p>
+            <a:pPr>
+              <a:spcBef>
+                <a:spcPts val="500"/>
+              </a:spcBef>
+              <a:spcAft>
+                <a:spcPts val="0"/>
+              </a:spcAft>
+            </a:pPr>
+            <a:r>
+              <a:rPr sz="1050">
+                <a:solidFill>
+                  <a:srgbClr val="2B3645"/>
+                </a:solidFill>
+              </a:rPr>
+              <a:t>Heading channel, gyro → compass   </a:t>
+            </a:r>
+            <a:r>
+              <a:rPr sz="1050" b="1">
+                <a:solidFill>
+                  <a:srgbClr val="008A72"/>
+                </a:solidFill>
+              </a:rPr>
+              <a:t>16.9% → 7.2%</a:t>
+            </a:r>
+          </a:p>
+          <a:p>
+            <a:pPr>
+              <a:spcBef>
+                <a:spcPts val="500"/>
+              </a:spcBef>
+              <a:spcAft>
+                <a:spcPts val="0"/>
+              </a:spcAft>
+            </a:pPr>
+            <a:r>
+              <a:rPr sz="1050">
+                <a:solidFill>
+                  <a:srgbClr val="2B3645"/>
+                </a:solidFill>
+              </a:rPr>
+              <a:t>GNSS+INS fusion   </a:t>
+            </a:r>
+            <a:r>
+              <a:rPr sz="1050" b="1">
+                <a:solidFill>
+                  <a:srgbClr val="C2393D"/>
+                </a:solidFill>
+              </a:rPr>
+              <a:t>1.07× — a wash, reported as such</a:t>
+            </a:r>
+          </a:p>
+          <a:p>
+            <a:pPr>
+              <a:spcBef>
+                <a:spcPts val="500"/>
+              </a:spcBef>
+              <a:spcAft>
+                <a:spcPts val="0"/>
+              </a:spcAft>
+            </a:pPr>
+            <a:r>
+              <a:rPr sz="1050">
+                <a:solidFill>
+                  <a:srgbClr val="2B3645"/>
+                </a:solidFill>
+              </a:rPr>
+              <a:t>Edge engine, worst configuration   </a:t>
+            </a:r>
+            <a:r>
+              <a:rPr sz="1050" b="1">
+                <a:solidFill>
+                  <a:srgbClr val="008A72"/>
+                </a:solidFill>
+              </a:rPr>
+              <a:t>19,682 Hz = 98× the requirement</a:t>
+            </a:r>
+          </a:p>
+          <a:p>
+            <a:pPr>
+              <a:spcBef>
+                <a:spcPts val="500"/>
+              </a:spcBef>
+              <a:spcAft>
+                <a:spcPts val="0"/>
+              </a:spcAft>
+            </a:pPr>
+            <a:r>
+              <a:rPr sz="1050">
+                <a:solidFill>
+                  <a:srgbClr val="2B3645"/>
+                </a:solidFill>
+              </a:rPr>
+              <a:t>GNSS ⇄ dead-reckoning handover   </a:t>
+            </a:r>
+            <a:r>
+              <a:rPr sz="1050" b="1">
+                <a:solidFill>
+                  <a:srgbClr val="008A72"/>
+                </a:solidFill>
+              </a:rPr>
+              <a:t>100 ms, both directions</a:t>
+            </a:r>
+          </a:p>
+          <a:p>
+            <a:pPr>
+              <a:spcBef>
+                <a:spcPts val="1200"/>
+              </a:spcBef>
+            </a:pPr>
+            <a:r>
+              <a:rPr sz="1050" i="1">
+                <a:solidFill>
+                  <a:srgbClr val="6B7A8C"/>
+                </a:solidFill>
+              </a:rPr>
+              <a:t>We publish our negative results alongside our wins. A record that contains only successes is one nobody should trust.</a:t>
+            </a:r>
+          </a:p>
+        </p:txBody>
+      </p:sp>
     </p:spTree>
     <p:extLst>
       <p:ext uri="{BB962C8B-B14F-4D97-AF65-F5344CB8AC3E}">
-        <p14:creationId xmlns:p14="http://schemas.microsoft.com/office/powerpoint/2010/main" val="1588084416"/>
+        <p14:creationId xmlns:p14="http://schemas.microsoft.com/office/powerpoint/2010/main" val="3916788613"/>
       </p:ext>
     </p:extLst>
   </p:cSld>

--- a/final_demo_pitch/ppt_assets/COAST_SIH2026_IDEA.pptx
+++ b/final_demo_pitch/ppt_assets/COAST_SIH2026_IDEA.pptx
@@ -5757,7 +5757,7 @@
                   <a:srgbClr val="0B1220"/>
                 </a:solidFill>
               </a:rPr>
-              <a:t>TEAM ID</a:t>
+              <a:t>TBD</a:t>
             </a:r>
           </a:p>
           <a:p>
@@ -5780,7 +5780,7 @@
                   <a:srgbClr val="0B1220"/>
                 </a:solidFill>
               </a:rPr>
-              <a:t>TEAM NAME</a:t>
+              <a:t>COAST</a:t>
             </a:r>
           </a:p>
         </p:txBody>
@@ -6050,7 +6050,7 @@
                   <a:srgbClr val="FFFFFF"/>
                 </a:solidFill>
               </a:rPr>
-              <a:t>TEAM NAME</a:t>
+              <a:t>COAST</a:t>
             </a:r>
             <a:endParaRPr lang="en-IN" dirty="0"/>
           </a:p>
@@ -6714,7 +6714,7 @@
                   <a:srgbClr val="FFFFFF"/>
                 </a:solidFill>
               </a:rPr>
-              <a:t>TEAM NAME</a:t>
+              <a:t>COAST</a:t>
             </a:r>
             <a:endParaRPr lang="en-IN" dirty="0"/>
           </a:p>
@@ -7451,7 +7451,7 @@
                   <a:srgbClr val="FFFFFF"/>
                 </a:solidFill>
               </a:rPr>
-              <a:t>TEAM NAME</a:t>
+              <a:t>COAST</a:t>
             </a:r>
             <a:endParaRPr lang="en-IN" dirty="0"/>
           </a:p>
@@ -7930,7 +7930,7 @@
                   <a:srgbClr val="2B3645"/>
                 </a:solidFill>
               </a:rPr>
-              <a:t>We are at 16.8% against a 27.6% baseline — roughly half the gap closed, with a measured route to the rest.</a:t>
+              <a:t>We are at 16.77% against a 27.58% baseline — roughly half the gap closed, with a measured route to the rest.</a:t>
             </a:r>
           </a:p>
           <a:p>
@@ -8307,7 +8307,7 @@
                   <a:srgbClr val="FFFFFF"/>
                 </a:solidFill>
               </a:rPr>
-              <a:t>TEAM NAME</a:t>
+              <a:t>COAST</a:t>
             </a:r>
             <a:endParaRPr lang="en-IN" dirty="0"/>
           </a:p>
@@ -9259,7 +9259,7 @@
                   <a:srgbClr val="FFFFFF"/>
                 </a:solidFill>
               </a:rPr>
-              <a:t>TEAM NAME</a:t>
+              <a:t>COAST</a:t>
             </a:r>
             <a:endParaRPr lang="en-IN" dirty="0"/>
           </a:p>
@@ -9652,7 +9652,7 @@
                   <a:srgbClr val="008A72"/>
                 </a:solidFill>
               </a:rPr>
-              <a:t>27.6% → 16.8%</a:t>
+              <a:t>27.58% → 16.77%</a:t>
             </a:r>
           </a:p>
           <a:p>
@@ -9678,7 +9678,7 @@
                   <a:srgbClr val="008A72"/>
                 </a:solidFill>
               </a:rPr>
-              <a:t>16.9% → 7.2%</a:t>
+              <a:t>16.87% → 7.22%</a:t>
             </a:r>
           </a:p>
           <a:p>
